--- a/Project_Z/docs/박종호B_직무과제_완료보고서.pptx
+++ b/Project_Z/docs/박종호B_직무과제_완료보고서.pptx
@@ -7,14 +7,23 @@
     <p:sldMasterId id="2147483727" r:id="rId3"/>
   </p:sldMasterIdLst>
   <p:notesMasterIdLst>
-    <p:notesMasterId r:id="rId9"/>
+    <p:notesMasterId r:id="rId18"/>
   </p:notesMasterIdLst>
   <p:sldIdLst>
     <p:sldId id="343" r:id="rId4"/>
     <p:sldId id="256" r:id="rId5"/>
     <p:sldId id="295" r:id="rId6"/>
     <p:sldId id="345" r:id="rId7"/>
-    <p:sldId id="344" r:id="rId8"/>
+    <p:sldId id="351" r:id="rId8"/>
+    <p:sldId id="346" r:id="rId9"/>
+    <p:sldId id="352" r:id="rId10"/>
+    <p:sldId id="347" r:id="rId11"/>
+    <p:sldId id="354" r:id="rId12"/>
+    <p:sldId id="348" r:id="rId13"/>
+    <p:sldId id="355" r:id="rId14"/>
+    <p:sldId id="349" r:id="rId15"/>
+    <p:sldId id="353" r:id="rId16"/>
+    <p:sldId id="344" r:id="rId17"/>
   </p:sldIdLst>
   <p:sldSz cx="12192000" cy="6858000"/>
   <p:notesSz cx="6858000" cy="9144000"/>
@@ -203,7 +212,7 @@
           <a:p>
             <a:fld id="{02FEB434-0EB4-4E3F-A14E-FFA59ADF6F04}" type="datetimeFigureOut">
               <a:rPr lang="ko-KR" altLang="en-US" smtClean="0"/>
-              <a:t>2026-10-27</a:t>
+              <a:t>2026-10-28</a:t>
             </a:fld>
             <a:endParaRPr lang="ko-KR" altLang="en-US"/>
           </a:p>
@@ -1003,7 +1012,7 @@
           <a:p>
             <a:fld id="{5AD814BE-64A9-43B1-9DF3-EBA91FA31615}" type="datetimeFigureOut">
               <a:rPr lang="ko-KR" altLang="en-US" smtClean="0"/>
-              <a:t>2026-10-27</a:t>
+              <a:t>2026-10-28</a:t>
             </a:fld>
             <a:endParaRPr lang="ko-KR" altLang="en-US"/>
           </a:p>
@@ -1173,7 +1182,7 @@
           <a:p>
             <a:fld id="{5AD814BE-64A9-43B1-9DF3-EBA91FA31615}" type="datetimeFigureOut">
               <a:rPr lang="ko-KR" altLang="en-US" smtClean="0"/>
-              <a:t>2026-10-27</a:t>
+              <a:t>2026-10-28</a:t>
             </a:fld>
             <a:endParaRPr lang="ko-KR" altLang="en-US"/>
           </a:p>
@@ -1353,7 +1362,7 @@
           <a:p>
             <a:fld id="{5AD814BE-64A9-43B1-9DF3-EBA91FA31615}" type="datetimeFigureOut">
               <a:rPr lang="ko-KR" altLang="en-US" smtClean="0"/>
-              <a:t>2026-10-27</a:t>
+              <a:t>2026-10-28</a:t>
             </a:fld>
             <a:endParaRPr lang="ko-KR" altLang="en-US"/>
           </a:p>
@@ -1613,7 +1622,7 @@
           <a:p>
             <a:fld id="{5AD814BE-64A9-43B1-9DF3-EBA91FA31615}" type="datetimeFigureOut">
               <a:rPr lang="ko-KR" altLang="en-US" smtClean="0"/>
-              <a:t>2026-10-27</a:t>
+              <a:t>2026-10-28</a:t>
             </a:fld>
             <a:endParaRPr lang="ko-KR" altLang="en-US"/>
           </a:p>
@@ -1859,7 +1868,7 @@
           <a:p>
             <a:fld id="{5AD814BE-64A9-43B1-9DF3-EBA91FA31615}" type="datetimeFigureOut">
               <a:rPr lang="ko-KR" altLang="en-US" smtClean="0"/>
-              <a:t>2026-10-27</a:t>
+              <a:t>2026-10-28</a:t>
             </a:fld>
             <a:endParaRPr lang="ko-KR" altLang="en-US"/>
           </a:p>
@@ -2091,7 +2100,7 @@
           <a:p>
             <a:fld id="{5AD814BE-64A9-43B1-9DF3-EBA91FA31615}" type="datetimeFigureOut">
               <a:rPr lang="ko-KR" altLang="en-US" smtClean="0"/>
-              <a:t>2026-10-27</a:t>
+              <a:t>2026-10-28</a:t>
             </a:fld>
             <a:endParaRPr lang="ko-KR" altLang="en-US"/>
           </a:p>
@@ -2458,7 +2467,7 @@
           <a:p>
             <a:fld id="{5AD814BE-64A9-43B1-9DF3-EBA91FA31615}" type="datetimeFigureOut">
               <a:rPr lang="ko-KR" altLang="en-US" smtClean="0"/>
-              <a:t>2026-10-27</a:t>
+              <a:t>2026-10-28</a:t>
             </a:fld>
             <a:endParaRPr lang="ko-KR" altLang="en-US"/>
           </a:p>
@@ -2576,7 +2585,7 @@
           <a:p>
             <a:fld id="{5AD814BE-64A9-43B1-9DF3-EBA91FA31615}" type="datetimeFigureOut">
               <a:rPr lang="ko-KR" altLang="en-US" smtClean="0"/>
-              <a:t>2026-10-27</a:t>
+              <a:t>2026-10-28</a:t>
             </a:fld>
             <a:endParaRPr lang="ko-KR" altLang="en-US"/>
           </a:p>
@@ -2671,7 +2680,7 @@
           <a:p>
             <a:fld id="{5AD814BE-64A9-43B1-9DF3-EBA91FA31615}" type="datetimeFigureOut">
               <a:rPr lang="ko-KR" altLang="en-US" smtClean="0"/>
-              <a:t>2026-10-27</a:t>
+              <a:t>2026-10-28</a:t>
             </a:fld>
             <a:endParaRPr lang="ko-KR" altLang="en-US"/>
           </a:p>
@@ -2948,7 +2957,7 @@
           <a:p>
             <a:fld id="{5AD814BE-64A9-43B1-9DF3-EBA91FA31615}" type="datetimeFigureOut">
               <a:rPr lang="ko-KR" altLang="en-US" smtClean="0"/>
-              <a:t>2026-10-27</a:t>
+              <a:t>2026-10-28</a:t>
             </a:fld>
             <a:endParaRPr lang="ko-KR" altLang="en-US"/>
           </a:p>
@@ -3205,7 +3214,7 @@
           <a:p>
             <a:fld id="{5AD814BE-64A9-43B1-9DF3-EBA91FA31615}" type="datetimeFigureOut">
               <a:rPr lang="ko-KR" altLang="en-US" smtClean="0"/>
-              <a:t>2026-10-27</a:t>
+              <a:t>2026-10-28</a:t>
             </a:fld>
             <a:endParaRPr lang="ko-KR" altLang="en-US"/>
           </a:p>
@@ -3418,7 +3427,7 @@
           <a:p>
             <a:fld id="{C764DE79-268F-4C1A-8933-263129D2AF90}" type="datetimeFigureOut">
               <a:rPr lang="en-US" smtClean="0"/>
-              <a:t>10/27/2026</a:t>
+              <a:t>10/28/2026</a:t>
             </a:fld>
             <a:endParaRPr lang="en-US" dirty="0"/>
           </a:p>
@@ -5707,6 +5716,2049 @@
 </p:sld>
 </file>
 
+<file path=ppt/slides/slide10.xml><?xml version="1.0" encoding="utf-8"?>
+<p:sld xmlns:a="http://schemas.openxmlformats.org/drawingml/2006/main" xmlns:r="http://schemas.openxmlformats.org/officeDocument/2006/relationships" xmlns:p="http://schemas.openxmlformats.org/presentationml/2006/main">
+  <p:cSld>
+    <p:spTree>
+      <p:nvGrpSpPr>
+        <p:cNvPr id="1" name=""/>
+        <p:cNvGrpSpPr/>
+        <p:nvPr/>
+      </p:nvGrpSpPr>
+      <p:grpSpPr>
+        <a:xfrm>
+          <a:off x="0" y="0"/>
+          <a:ext cx="0" cy="0"/>
+          <a:chOff x="0" y="0"/>
+          <a:chExt cx="0" cy="0"/>
+        </a:xfrm>
+      </p:grpSpPr>
+      <p:sp>
+        <p:nvSpPr>
+          <p:cNvPr id="7" name="TextBox 6">
+            <a:extLst>
+              <a:ext uri="{FF2B5EF4-FFF2-40B4-BE49-F238E27FC236}">
+                <a16:creationId xmlns:a16="http://schemas.microsoft.com/office/drawing/2014/main" id="{B8665D54-35A4-14CF-2D0E-EC1F2C4DEF24}"/>
+              </a:ext>
+            </a:extLst>
+          </p:cNvPr>
+          <p:cNvSpPr txBox="1"/>
+          <p:nvPr/>
+        </p:nvSpPr>
+        <p:spPr>
+          <a:xfrm>
+            <a:off x="469518" y="366623"/>
+            <a:ext cx="10646156" cy="6124754"/>
+          </a:xfrm>
+          <a:prstGeom prst="rect">
+            <a:avLst/>
+          </a:prstGeom>
+          <a:noFill/>
+        </p:spPr>
+        <p:txBody>
+          <a:bodyPr wrap="square">
+            <a:spAutoFit/>
+          </a:bodyPr>
+          <a:lstStyle/>
+          <a:p>
+            <a:pPr marL="285750" indent="-285750">
+              <a:spcAft>
+                <a:spcPts val="600"/>
+              </a:spcAft>
+              <a:buFontTx/>
+              <a:buChar char="-"/>
+            </a:pPr>
+            <a:r>
+              <a:rPr sz="1600">
+                <a:solidFill>
+                  <a:srgbClr val="232323"/>
+                </a:solidFill>
+                <a:latin typeface="맑은 고딕"/>
+              </a:rPr>
+              <a:t>주요 UI·아이템 클래스 및 함수</a:t>
+            </a:r>
+          </a:p>
+          <a:p>
+            <a:pPr>
+              <a:spcAft>
+                <a:spcPts val="600"/>
+              </a:spcAft>
+            </a:pPr>
+            <a:r>
+              <a:rPr sz="1600">
+                <a:solidFill>
+                  <a:srgbClr val="232323"/>
+                </a:solidFill>
+                <a:latin typeface="맑은 고딕"/>
+              </a:rPr>
+              <a:t>• CreateHUDWidget(), HUDWidgetClass, HUDWidget</a:t>
+            </a:r>
+          </a:p>
+          <a:p>
+            <a:pPr>
+              <a:spcAft>
+                <a:spcPts val="600"/>
+              </a:spcAft>
+            </a:pPr>
+            <a:r>
+              <a:rPr sz="1600">
+                <a:solidFill>
+                  <a:srgbClr val="232323"/>
+                </a:solidFill>
+                <a:latin typeface="맑은 고딕"/>
+              </a:rPr>
+              <a:t>• UZStateHUDWidget::RefreshCurrentStatus(): HP·쉴드·탄약</a:t>
+            </a:r>
+          </a:p>
+          <a:p>
+            <a:pPr>
+              <a:spcAft>
+                <a:spcPts val="600"/>
+              </a:spcAft>
+            </a:pPr>
+            <a:r>
+              <a:rPr sz="1600">
+                <a:solidFill>
+                  <a:srgbClr val="232323"/>
+                </a:solidFill>
+                <a:latin typeface="맑은 고딕"/>
+              </a:rPr>
+              <a:t>• UZTeamStatusWidget::RefreshTeamStatus(): 점수·시간·팀</a:t>
+            </a:r>
+          </a:p>
+          <a:p>
+            <a:pPr>
+              <a:spcAft>
+                <a:spcPts val="600"/>
+              </a:spcAft>
+            </a:pPr>
+            <a:r>
+              <a:rPr sz="1600">
+                <a:solidFill>
+                  <a:srgbClr val="232323"/>
+                </a:solidFill>
+                <a:latin typeface="맑은 고딕"/>
+              </a:rPr>
+              <a:t>• UpdateTeamMarkerPresentation(): 차폐 검사·팀 관계</a:t>
+            </a:r>
+          </a:p>
+          <a:p>
+            <a:pPr>
+              <a:spcAft>
+                <a:spcPts val="600"/>
+              </a:spcAft>
+            </a:pPr>
+            <a:r>
+              <a:rPr sz="1600">
+                <a:solidFill>
+                  <a:srgbClr val="232323"/>
+                </a:solidFill>
+                <a:latin typeface="맑은 고딕"/>
+              </a:rPr>
+              <a:t>• AZShieldPickupActor::OnOverlapBegin(): 서버 회복 확인 후 소비</a:t>
+            </a:r>
+          </a:p>
+          <a:p>
+            <a:pPr>
+              <a:spcAft>
+                <a:spcPts val="600"/>
+              </a:spcAft>
+            </a:pPr>
+            <a:r>
+              <a:rPr sz="1600">
+                <a:solidFill>
+                  <a:srgbClr val="232323"/>
+                </a:solidFill>
+                <a:latin typeface="맑은 고딕"/>
+              </a:rPr>
+              <a:t>• SpawnInitialShieldPickups(), SchedulePickupRespawn()</a:t>
+            </a:r>
+          </a:p>
+          <a:p>
+            <a:pPr>
+              <a:spcAft>
+                <a:spcPts val="600"/>
+              </a:spcAft>
+            </a:pPr>
+            <a:r>
+              <a:rPr sz="1600">
+                <a:solidFill>
+                  <a:srgbClr val="232323"/>
+                </a:solidFill>
+                <a:latin typeface="맑은 고딕"/>
+              </a:rPr>
+              <a:t>• PickupSpawnOptionBag: 무기·쉴드 4종 셔플 백</a:t>
+            </a:r>
+          </a:p>
+          <a:p>
+            <a:pPr>
+              <a:spcAft>
+                <a:spcPts val="600"/>
+              </a:spcAft>
+            </a:pPr>
+            <a:endParaRPr sz="1600">
+              <a:solidFill>
+                <a:srgbClr val="232323"/>
+              </a:solidFill>
+              <a:latin typeface="맑은 고딕"/>
+            </a:endParaRPr>
+          </a:p>
+          <a:p>
+            <a:pPr>
+              <a:spcAft>
+                <a:spcPts val="600"/>
+              </a:spcAft>
+            </a:pPr>
+            <a:r>
+              <a:rPr sz="1600">
+                <a:solidFill>
+                  <a:srgbClr val="232323"/>
+                </a:solidFill>
+                <a:latin typeface="맑은 고딕"/>
+              </a:rPr>
+              <a:t>구현 정책</a:t>
+            </a:r>
+          </a:p>
+          <a:p>
+            <a:pPr>
+              <a:spcAft>
+                <a:spcPts val="600"/>
+              </a:spcAft>
+            </a:pPr>
+            <a:r>
+              <a:rPr sz="1600">
+                <a:solidFill>
+                  <a:srgbClr val="232323"/>
+                </a:solidFill>
+                <a:latin typeface="맑은 고딕"/>
+              </a:rPr>
+              <a:t>• 픽업은 소비한 지점만 기본 10초 뒤 재생성</a:t>
+            </a:r>
+          </a:p>
+          <a:p>
+            <a:pPr>
+              <a:spcAft>
+                <a:spcPts val="600"/>
+              </a:spcAft>
+            </a:pPr>
+            <a:r>
+              <a:rPr sz="1600">
+                <a:solidFill>
+                  <a:srgbClr val="232323"/>
+                </a:solidFill>
+                <a:latin typeface="맑은 고딕"/>
+              </a:rPr>
+              <a:t>• UI는 상태 원본이 아닌 조회·표현 담당</a:t>
+            </a:r>
+          </a:p>
+          <a:p>
+            <a:pPr>
+              <a:spcAft>
+                <a:spcPts val="600"/>
+              </a:spcAft>
+            </a:pPr>
+            <a:r>
+              <a:rPr sz="1600">
+                <a:solidFill>
+                  <a:srgbClr val="232323"/>
+                </a:solidFill>
+                <a:latin typeface="맑은 고딕"/>
+              </a:rPr>
+              <a:t>• 현재 Tick 조회와 변경 이벤트 혼합 구조</a:t>
+            </a:r>
+          </a:p>
+        </p:txBody>
+      </p:sp>
+    </p:spTree>
+    <p:extLst>
+      <p:ext uri="{BB962C8B-B14F-4D97-AF65-F5344CB8AC3E}">
+        <p14:creationId xmlns:p14="http://schemas.microsoft.com/office/powerpoint/2010/main" val="3987594794"/>
+      </p:ext>
+    </p:extLst>
+  </p:cSld>
+  <p:clrMapOvr>
+    <a:masterClrMapping/>
+  </p:clrMapOvr>
+</p:sld>
+</file>
+
+<file path=ppt/slides/slide11.xml><?xml version="1.0" encoding="utf-8"?>
+<p:sld xmlns:a="http://schemas.openxmlformats.org/drawingml/2006/main" xmlns:r="http://schemas.openxmlformats.org/officeDocument/2006/relationships" xmlns:p="http://schemas.openxmlformats.org/presentationml/2006/main">
+  <p:cSld>
+    <p:spTree>
+      <p:nvGrpSpPr>
+        <p:cNvPr id="1" name=""/>
+        <p:cNvGrpSpPr/>
+        <p:nvPr/>
+      </p:nvGrpSpPr>
+      <p:grpSpPr>
+        <a:xfrm>
+          <a:off x="0" y="0"/>
+          <a:ext cx="0" cy="0"/>
+          <a:chOff x="0" y="0"/>
+          <a:chExt cx="0" cy="0"/>
+        </a:xfrm>
+      </p:grpSpPr>
+      <p:sp>
+        <p:nvSpPr>
+          <p:cNvPr id="2" name="TextBox 1"/>
+          <p:cNvSpPr txBox="1"/>
+          <p:nvPr/>
+        </p:nvSpPr>
+        <p:spPr>
+          <a:xfrm>
+            <a:off x="630936" y="411480"/>
+            <a:ext cx="10241280" cy="411480"/>
+          </a:xfrm>
+          <a:prstGeom prst="rect">
+            <a:avLst/>
+          </a:prstGeom>
+          <a:noFill/>
+        </p:spPr>
+        <p:txBody>
+          <a:bodyPr wrap="square" lIns="27432" tIns="9144" rIns="27432" bIns="9144">
+            <a:spAutoFit/>
+          </a:bodyPr>
+          <a:lstStyle/>
+          <a:p>
+            <a:pPr>
+              <a:lnSpc>
+                <a:spcPct val="105000"/>
+              </a:lnSpc>
+              <a:spcAft>
+                <a:spcPts val="600"/>
+              </a:spcAft>
+            </a:pPr>
+            <a:r>
+              <a:rPr sz="2200">
+                <a:solidFill>
+                  <a:srgbClr val="232323"/>
+                </a:solidFill>
+                <a:latin typeface="맑은 고딕"/>
+              </a:rPr>
+              <a:t>5-4. 데이터·네트워크 구현을 통한 역량 향상</a:t>
+            </a:r>
+          </a:p>
+        </p:txBody>
+      </p:sp>
+      <p:sp>
+        <p:nvSpPr>
+          <p:cNvPr id="3" name="TextBox 2"/>
+          <p:cNvSpPr txBox="1"/>
+          <p:nvPr/>
+        </p:nvSpPr>
+        <p:spPr>
+          <a:xfrm>
+            <a:off x="749808" y="868680"/>
+            <a:ext cx="10104120" cy="5004447"/>
+          </a:xfrm>
+          <a:prstGeom prst="rect">
+            <a:avLst/>
+          </a:prstGeom>
+          <a:noFill/>
+        </p:spPr>
+        <p:txBody>
+          <a:bodyPr wrap="square" lIns="0" tIns="0" rIns="0" bIns="0">
+            <a:spAutoFit/>
+          </a:bodyPr>
+          <a:lstStyle/>
+          <a:p>
+            <a:pPr marL="285750" indent="-285750">
+              <a:spcAft>
+                <a:spcPts val="600"/>
+              </a:spcAft>
+              <a:buFont typeface="Arial" panose="020B0604020202020204" pitchFamily="34" charset="0"/>
+              <a:buChar char="•"/>
+            </a:pPr>
+            <a:r>
+              <a:rPr sz="1600">
+                <a:solidFill>
+                  <a:srgbClr val="232323"/>
+                </a:solidFill>
+                <a:latin typeface="맑은 고딕"/>
+              </a:rPr>
+              <a:t>수행 내용</a:t>
+            </a:r>
+            <a:endParaRPr lang="en-US" sz="1320" b="0" dirty="0">
+              <a:solidFill>
+                <a:srgbClr val="000000"/>
+              </a:solidFill>
+            </a:endParaRPr>
+          </a:p>
+          <a:p>
+            <a:pPr>
+              <a:spcAft>
+                <a:spcPts val="600"/>
+              </a:spcAft>
+            </a:pPr>
+            <a:r>
+              <a:rPr sz="1600">
+                <a:solidFill>
+                  <a:srgbClr val="232323"/>
+                </a:solidFill>
+                <a:latin typeface="맑은 고딕"/>
+              </a:rPr>
+              <a:t>• WeaponDataAsset으로 공격력·탄약·발사체·조준 설정 분리</a:t>
+            </a:r>
+          </a:p>
+          <a:p>
+            <a:pPr>
+              <a:spcAft>
+                <a:spcPts val="600"/>
+              </a:spcAft>
+            </a:pPr>
+            <a:r>
+              <a:rPr sz="1600">
+                <a:solidFill>
+                  <a:srgbClr val="232323"/>
+                </a:solidFill>
+                <a:latin typeface="맑은 고딕"/>
+              </a:rPr>
+              <a:t>• 서버 RPC에서 무기 픽업·발사·재장전 조건 재검증</a:t>
+            </a:r>
+          </a:p>
+          <a:p>
+            <a:pPr>
+              <a:spcAft>
+                <a:spcPts val="600"/>
+              </a:spcAft>
+            </a:pPr>
+            <a:r>
+              <a:rPr sz="1600">
+                <a:solidFill>
+                  <a:srgbClr val="232323"/>
+                </a:solidFill>
+                <a:latin typeface="맑은 고딕"/>
+              </a:rPr>
+              <a:t>• PlayerState·GameState·캐릭터 상태 복제와 RepNotify 연동</a:t>
+            </a:r>
+          </a:p>
+          <a:p>
+            <a:pPr>
+              <a:spcAft>
+                <a:spcPts val="600"/>
+              </a:spcAft>
+            </a:pPr>
+            <a:r>
+              <a:rPr sz="1600">
+                <a:solidFill>
+                  <a:srgbClr val="232323"/>
+                </a:solidFill>
+                <a:latin typeface="맑은 고딕"/>
+              </a:rPr>
+              <a:t>• 팀 선택 승인과 Pawn 실제 생성 가능 여부 분리</a:t>
+            </a:r>
+          </a:p>
+          <a:p>
+            <a:pPr>
+              <a:spcAft>
+                <a:spcPts val="600"/>
+              </a:spcAft>
+            </a:pPr>
+            <a:endParaRPr sz="1600">
+              <a:solidFill>
+                <a:srgbClr val="232323"/>
+              </a:solidFill>
+              <a:latin typeface="맑은 고딕"/>
+            </a:endParaRPr>
+          </a:p>
+          <a:p>
+            <a:pPr>
+              <a:spcAft>
+                <a:spcPts val="600"/>
+              </a:spcAft>
+            </a:pPr>
+            <a:r>
+              <a:rPr sz="1600">
+                <a:solidFill>
+                  <a:srgbClr val="232323"/>
+                </a:solidFill>
+                <a:latin typeface="맑은 고딕"/>
+              </a:rPr>
+              <a:t>향상된 실무 역량</a:t>
+            </a:r>
+          </a:p>
+          <a:p>
+            <a:pPr>
+              <a:spcAft>
+                <a:spcPts val="600"/>
+              </a:spcAft>
+            </a:pPr>
+            <a:r>
+              <a:rPr sz="1600">
+                <a:solidFill>
+                  <a:srgbClr val="232323"/>
+                </a:solidFill>
+                <a:latin typeface="맑은 고딕"/>
+              </a:rPr>
+              <a:t>• 기본 설정과 런타임 변경 상태를 분리하여 확장</a:t>
+            </a:r>
+          </a:p>
+          <a:p>
+            <a:pPr>
+              <a:spcAft>
+                <a:spcPts val="600"/>
+              </a:spcAft>
+            </a:pPr>
+            <a:r>
+              <a:rPr sz="1600">
+                <a:solidFill>
+                  <a:srgbClr val="232323"/>
+                </a:solidFill>
+                <a:latin typeface="맑은 고딕"/>
+              </a:rPr>
+              <a:t>• 클라이언트 입력을 서버 결과로 직접 간주하지 않는 설계</a:t>
+            </a:r>
+          </a:p>
+          <a:p>
+            <a:pPr>
+              <a:spcAft>
+                <a:spcPts val="600"/>
+              </a:spcAft>
+            </a:pPr>
+            <a:r>
+              <a:rPr sz="1600">
+                <a:solidFill>
+                  <a:srgbClr val="232323"/>
+                </a:solidFill>
+                <a:latin typeface="맑은 고딕"/>
+              </a:rPr>
+              <a:t>• 복제 도착·Pawn 준비·UI 표시 순서 차이 분석</a:t>
+            </a:r>
+          </a:p>
+          <a:p>
+            <a:pPr>
+              <a:spcAft>
+                <a:spcPts val="600"/>
+              </a:spcAft>
+            </a:pPr>
+            <a:r>
+              <a:rPr sz="1600">
+                <a:solidFill>
+                  <a:srgbClr val="232323"/>
+                </a:solidFill>
+                <a:latin typeface="맑은 고딕"/>
+              </a:rPr>
+              <a:t>※ 기존 TPS의 GAS 적 피해 구현을 FPS 신규 성과로 중복 산정하지 않음</a:t>
+            </a:r>
+          </a:p>
+        </p:txBody>
+      </p:sp>
+    </p:spTree>
+  </p:cSld>
+  <p:clrMapOvr>
+    <a:masterClrMapping/>
+  </p:clrMapOvr>
+</p:sld>
+</file>
+
+<file path=ppt/slides/slide12.xml><?xml version="1.0" encoding="utf-8"?>
+<p:sld xmlns:a="http://schemas.openxmlformats.org/drawingml/2006/main" xmlns:r="http://schemas.openxmlformats.org/officeDocument/2006/relationships" xmlns:p="http://schemas.openxmlformats.org/presentationml/2006/main">
+  <p:cSld>
+    <p:spTree>
+      <p:nvGrpSpPr>
+        <p:cNvPr id="1" name=""/>
+        <p:cNvGrpSpPr/>
+        <p:nvPr/>
+      </p:nvGrpSpPr>
+      <p:grpSpPr>
+        <a:xfrm>
+          <a:off x="0" y="0"/>
+          <a:ext cx="0" cy="0"/>
+          <a:chOff x="0" y="0"/>
+          <a:chExt cx="0" cy="0"/>
+        </a:xfrm>
+      </p:grpSpPr>
+      <p:sp>
+        <p:nvSpPr>
+          <p:cNvPr id="5" name="TextBox 4">
+            <a:extLst>
+              <a:ext uri="{FF2B5EF4-FFF2-40B4-BE49-F238E27FC236}">
+                <a16:creationId xmlns:a16="http://schemas.microsoft.com/office/drawing/2014/main" id="{8437E518-0DBB-7BDE-9279-C18DC8D9AE95}"/>
+              </a:ext>
+            </a:extLst>
+          </p:cNvPr>
+          <p:cNvSpPr txBox="1"/>
+          <p:nvPr/>
+        </p:nvSpPr>
+        <p:spPr>
+          <a:xfrm>
+            <a:off x="469518" y="366623"/>
+            <a:ext cx="10646156" cy="3970318"/>
+          </a:xfrm>
+          <a:prstGeom prst="rect">
+            <a:avLst/>
+          </a:prstGeom>
+          <a:noFill/>
+        </p:spPr>
+        <p:txBody>
+          <a:bodyPr wrap="square">
+            <a:spAutoFit/>
+          </a:bodyPr>
+          <a:lstStyle/>
+          <a:p>
+            <a:pPr marL="742950" lvl="1" indent="-285750">
+              <a:spcAft>
+                <a:spcPts val="600"/>
+              </a:spcAft>
+              <a:buFontTx/>
+              <a:buChar char="-"/>
+            </a:pPr>
+            <a:r>
+              <a:rPr sz="1600">
+                <a:solidFill>
+                  <a:srgbClr val="232323"/>
+                </a:solidFill>
+                <a:latin typeface="맑은 고딕"/>
+              </a:rPr>
+              <a:t>주요 데이터·복제 항목</a:t>
+            </a:r>
+          </a:p>
+          <a:p>
+            <a:pPr>
+              <a:spcAft>
+                <a:spcPts val="600"/>
+              </a:spcAft>
+            </a:pPr>
+            <a:r>
+              <a:rPr sz="1600">
+                <a:solidFill>
+                  <a:srgbClr val="232323"/>
+                </a:solidFill>
+                <a:latin typeface="맑은 고딕"/>
+              </a:rPr>
+              <a:t>• UZWeaponDataAsset: 무기 기본 능력치·메시·소켓·조준</a:t>
+            </a:r>
+          </a:p>
+          <a:p>
+            <a:pPr>
+              <a:spcAft>
+                <a:spcPts val="600"/>
+              </a:spcAft>
+            </a:pPr>
+            <a:r>
+              <a:rPr sz="1600">
+                <a:solidFill>
+                  <a:srgbClr val="232323"/>
+                </a:solidFill>
+                <a:latin typeface="맑은 고딕"/>
+              </a:rPr>
+              <a:t>• CurrentWeaponData / OnRep_CurrentWeaponData(): 무기 표현</a:t>
+            </a:r>
+          </a:p>
+          <a:p>
+            <a:pPr>
+              <a:spcAft>
+                <a:spcPts val="600"/>
+              </a:spcAft>
+            </a:pPr>
+            <a:r>
+              <a:rPr sz="1600">
+                <a:solidFill>
+                  <a:srgbClr val="232323"/>
+                </a:solidFill>
+                <a:latin typeface="맑은 고딕"/>
+              </a:rPr>
+              <a:t>• SameWeaponDamageBonusStacks: 생명 단위 강화 상태</a:t>
+            </a:r>
+          </a:p>
+          <a:p>
+            <a:pPr>
+              <a:spcAft>
+                <a:spcPts val="600"/>
+              </a:spcAft>
+            </a:pPr>
+            <a:r>
+              <a:rPr sz="1600">
+                <a:solidFill>
+                  <a:srgbClr val="232323"/>
+                </a:solidFill>
+                <a:latin typeface="맑은 고딕"/>
+              </a:rPr>
+              <a:t>• PlayerTeam / OnRep_PlayerTeam(): 팀 상태 복제</a:t>
+            </a:r>
+          </a:p>
+          <a:p>
+            <a:pPr>
+              <a:spcAft>
+                <a:spcPts val="600"/>
+              </a:spcAft>
+            </a:pPr>
+            <a:r>
+              <a:rPr sz="1600">
+                <a:solidFill>
+                  <a:srgbClr val="232323"/>
+                </a:solidFill>
+                <a:latin typeface="맑은 고딕"/>
+              </a:rPr>
+              <a:t>• TeamAScore / TeamBScore: 팀 점수 공유</a:t>
+            </a:r>
+          </a:p>
+          <a:p>
+            <a:pPr>
+              <a:spcAft>
+                <a:spcPts val="600"/>
+              </a:spcAft>
+            </a:pPr>
+            <a:r>
+              <a:rPr sz="1600">
+                <a:solidFill>
+                  <a:srgbClr val="232323"/>
+                </a:solidFill>
+                <a:latin typeface="맑은 고딕"/>
+              </a:rPr>
+              <a:t>• RemainingMatchSeconds / MatchPhase / WinningTeam: 경기 정보</a:t>
+            </a:r>
+          </a:p>
+          <a:p>
+            <a:pPr>
+              <a:spcAft>
+                <a:spcPts val="600"/>
+              </a:spcAft>
+            </a:pPr>
+            <a:r>
+              <a:rPr sz="1600">
+                <a:solidFill>
+                  <a:srgbClr val="232323"/>
+                </a:solidFill>
+                <a:latin typeface="맑은 고딕"/>
+              </a:rPr>
+              <a:t>• CurrentShield / OnRep_CurrentShield(): 보호막 갱신</a:t>
+            </a:r>
+          </a:p>
+          <a:p>
+            <a:pPr>
+              <a:spcAft>
+                <a:spcPts val="600"/>
+              </a:spcAft>
+            </a:pPr>
+            <a:r>
+              <a:rPr sz="1600">
+                <a:solidFill>
+                  <a:srgbClr val="232323"/>
+                </a:solidFill>
+                <a:latin typeface="맑은 고딕"/>
+              </a:rPr>
+              <a:t>• bProjectileActive / OnRep_ProjectileActive(): 풀 재사용 표현</a:t>
+            </a:r>
+          </a:p>
+          <a:p>
+            <a:pPr>
+              <a:spcAft>
+                <a:spcPts val="600"/>
+              </a:spcAft>
+            </a:pPr>
+            <a:endParaRPr sz="1600">
+              <a:solidFill>
+                <a:srgbClr val="232323"/>
+              </a:solidFill>
+              <a:latin typeface="맑은 고딕"/>
+            </a:endParaRPr>
+          </a:p>
+          <a:p>
+            <a:pPr>
+              <a:spcAft>
+                <a:spcPts val="600"/>
+              </a:spcAft>
+            </a:pPr>
+            <a:r>
+              <a:rPr sz="1600">
+                <a:solidFill>
+                  <a:srgbClr val="232323"/>
+                </a:solidFill>
+                <a:latin typeface="맑은 고딕"/>
+              </a:rPr>
+              <a:t>설계 기준: 서버 판정 → 상태 복제 → 각 클라이언트 UI·표현 갱신</a:t>
+            </a:r>
+          </a:p>
+        </p:txBody>
+      </p:sp>
+    </p:spTree>
+    <p:extLst>
+      <p:ext uri="{BB962C8B-B14F-4D97-AF65-F5344CB8AC3E}">
+        <p14:creationId xmlns:p14="http://schemas.microsoft.com/office/powerpoint/2010/main" val="1872153159"/>
+      </p:ext>
+    </p:extLst>
+  </p:cSld>
+  <p:clrMapOvr>
+    <a:masterClrMapping/>
+  </p:clrMapOvr>
+</p:sld>
+</file>
+
+<file path=ppt/slides/slide13.xml><?xml version="1.0" encoding="utf-8"?>
+<p:sld xmlns:a="http://schemas.openxmlformats.org/drawingml/2006/main" xmlns:r="http://schemas.openxmlformats.org/officeDocument/2006/relationships" xmlns:p="http://schemas.openxmlformats.org/presentationml/2006/main">
+  <p:cSld>
+    <p:spTree>
+      <p:nvGrpSpPr>
+        <p:cNvPr id="1" name=""/>
+        <p:cNvGrpSpPr/>
+        <p:nvPr/>
+      </p:nvGrpSpPr>
+      <p:grpSpPr>
+        <a:xfrm>
+          <a:off x="0" y="0"/>
+          <a:ext cx="0" cy="0"/>
+          <a:chOff x="0" y="0"/>
+          <a:chExt cx="0" cy="0"/>
+        </a:xfrm>
+      </p:grpSpPr>
+      <p:sp>
+        <p:nvSpPr>
+          <p:cNvPr id="2" name="TextBox 1"/>
+          <p:cNvSpPr txBox="1"/>
+          <p:nvPr/>
+        </p:nvSpPr>
+        <p:spPr>
+          <a:xfrm>
+            <a:off x="630936" y="411480"/>
+            <a:ext cx="10241280" cy="411480"/>
+          </a:xfrm>
+          <a:prstGeom prst="rect">
+            <a:avLst/>
+          </a:prstGeom>
+          <a:noFill/>
+        </p:spPr>
+        <p:txBody>
+          <a:bodyPr wrap="square" lIns="27432" tIns="9144" rIns="27432" bIns="9144">
+            <a:spAutoFit/>
+          </a:bodyPr>
+          <a:lstStyle/>
+          <a:p>
+            <a:pPr>
+              <a:lnSpc>
+                <a:spcPct val="105000"/>
+              </a:lnSpc>
+              <a:spcAft>
+                <a:spcPts val="600"/>
+              </a:spcAft>
+            </a:pPr>
+            <a:r>
+              <a:rPr sz="2200">
+                <a:solidFill>
+                  <a:srgbClr val="232323"/>
+                </a:solidFill>
+                <a:latin typeface="맑은 고딕"/>
+              </a:rPr>
+              <a:t>5-5. 경기 진행·리스폰 구현을 통한 역량 향상</a:t>
+            </a:r>
+          </a:p>
+        </p:txBody>
+      </p:sp>
+      <p:sp>
+        <p:nvSpPr>
+          <p:cNvPr id="3" name="TextBox 2"/>
+          <p:cNvSpPr txBox="1"/>
+          <p:nvPr/>
+        </p:nvSpPr>
+        <p:spPr>
+          <a:xfrm>
+            <a:off x="749808" y="868680"/>
+            <a:ext cx="10104120" cy="3616375"/>
+          </a:xfrm>
+          <a:prstGeom prst="rect">
+            <a:avLst/>
+          </a:prstGeom>
+          <a:noFill/>
+        </p:spPr>
+        <p:txBody>
+          <a:bodyPr wrap="square" lIns="0" tIns="0" rIns="0" bIns="0">
+            <a:spAutoFit/>
+          </a:bodyPr>
+          <a:lstStyle/>
+          <a:p>
+            <a:pPr marL="285750" indent="-285750">
+              <a:spcAft>
+                <a:spcPts val="600"/>
+              </a:spcAft>
+              <a:buFont typeface="Arial" panose="020B0604020202020204" pitchFamily="34" charset="0"/>
+              <a:buChar char="•"/>
+            </a:pPr>
+            <a:r>
+              <a:rPr sz="1500" dirty="0" err="1">
+                <a:solidFill>
+                  <a:srgbClr val="232323"/>
+                </a:solidFill>
+                <a:latin typeface="맑은 고딕"/>
+              </a:rPr>
+              <a:t>수행</a:t>
+            </a:r>
+            <a:r>
+              <a:rPr sz="1500" dirty="0">
+                <a:solidFill>
+                  <a:srgbClr val="232323"/>
+                </a:solidFill>
+                <a:latin typeface="맑은 고딕"/>
+              </a:rPr>
+              <a:t> </a:t>
+            </a:r>
+            <a:r>
+              <a:rPr sz="1500" dirty="0" err="1">
+                <a:solidFill>
+                  <a:srgbClr val="232323"/>
+                </a:solidFill>
+                <a:latin typeface="맑은 고딕"/>
+              </a:rPr>
+              <a:t>내용</a:t>
+            </a:r>
+            <a:endParaRPr lang="en-US" altLang="ko-KR" sz="1400" dirty="0">
+              <a:solidFill>
+                <a:srgbClr val="000000"/>
+              </a:solidFill>
+            </a:endParaRPr>
+          </a:p>
+          <a:p>
+            <a:pPr>
+              <a:spcAft>
+                <a:spcPts val="600"/>
+              </a:spcAft>
+            </a:pPr>
+            <a:r>
+              <a:rPr sz="1500" dirty="0">
+                <a:solidFill>
+                  <a:srgbClr val="232323"/>
+                </a:solidFill>
+                <a:latin typeface="맑은 고딕"/>
+              </a:rPr>
+              <a:t>• Waiting → Playing → Finished </a:t>
+            </a:r>
+            <a:r>
+              <a:rPr sz="1500" dirty="0" err="1">
+                <a:solidFill>
+                  <a:srgbClr val="232323"/>
+                </a:solidFill>
+                <a:latin typeface="맑은 고딕"/>
+              </a:rPr>
+              <a:t>경기</a:t>
+            </a:r>
+            <a:r>
+              <a:rPr sz="1500" dirty="0">
+                <a:solidFill>
+                  <a:srgbClr val="232323"/>
+                </a:solidFill>
+                <a:latin typeface="맑은 고딕"/>
+              </a:rPr>
+              <a:t> </a:t>
+            </a:r>
+            <a:r>
+              <a:rPr sz="1500" dirty="0" err="1">
+                <a:solidFill>
+                  <a:srgbClr val="232323"/>
+                </a:solidFill>
+                <a:latin typeface="맑은 고딕"/>
+              </a:rPr>
+              <a:t>단계</a:t>
+            </a:r>
+            <a:r>
+              <a:rPr sz="1500" dirty="0">
+                <a:solidFill>
+                  <a:srgbClr val="232323"/>
+                </a:solidFill>
+                <a:latin typeface="맑은 고딕"/>
+              </a:rPr>
+              <a:t> </a:t>
+            </a:r>
+            <a:r>
+              <a:rPr sz="1500" dirty="0" err="1">
+                <a:solidFill>
+                  <a:srgbClr val="232323"/>
+                </a:solidFill>
+                <a:latin typeface="맑은 고딕"/>
+              </a:rPr>
+              <a:t>구성</a:t>
+            </a:r>
+            <a:endParaRPr sz="1500" dirty="0">
+              <a:solidFill>
+                <a:srgbClr val="232323"/>
+              </a:solidFill>
+              <a:latin typeface="맑은 고딕"/>
+            </a:endParaRPr>
+          </a:p>
+          <a:p>
+            <a:pPr>
+              <a:spcAft>
+                <a:spcPts val="600"/>
+              </a:spcAft>
+            </a:pPr>
+            <a:r>
+              <a:rPr sz="1500" dirty="0">
+                <a:solidFill>
+                  <a:srgbClr val="232323"/>
+                </a:solidFill>
+                <a:latin typeface="맑은 고딕"/>
+              </a:rPr>
+              <a:t>• 양 팀 </a:t>
+            </a:r>
+            <a:r>
+              <a:rPr sz="1500" dirty="0" err="1">
+                <a:solidFill>
+                  <a:srgbClr val="232323"/>
+                </a:solidFill>
+                <a:latin typeface="맑은 고딕"/>
+              </a:rPr>
+              <a:t>인원</a:t>
+            </a:r>
+            <a:r>
+              <a:rPr sz="1500" dirty="0">
+                <a:solidFill>
+                  <a:srgbClr val="232323"/>
+                </a:solidFill>
+                <a:latin typeface="맑은 고딕"/>
+              </a:rPr>
+              <a:t> </a:t>
+            </a:r>
+            <a:r>
+              <a:rPr sz="1500" dirty="0" err="1">
+                <a:solidFill>
+                  <a:srgbClr val="232323"/>
+                </a:solidFill>
+                <a:latin typeface="맑은 고딕"/>
+              </a:rPr>
+              <a:t>존재</a:t>
+            </a:r>
+            <a:r>
+              <a:rPr sz="1500" dirty="0">
+                <a:solidFill>
+                  <a:srgbClr val="232323"/>
+                </a:solidFill>
+                <a:latin typeface="맑은 고딕"/>
+              </a:rPr>
+              <a:t> 시 </a:t>
+            </a:r>
+            <a:r>
+              <a:rPr sz="1500" dirty="0" err="1">
+                <a:solidFill>
+                  <a:srgbClr val="232323"/>
+                </a:solidFill>
+                <a:latin typeface="맑은 고딕"/>
+              </a:rPr>
+              <a:t>시작</a:t>
+            </a:r>
+            <a:r>
+              <a:rPr sz="1500" dirty="0">
+                <a:solidFill>
+                  <a:srgbClr val="232323"/>
+                </a:solidFill>
+                <a:latin typeface="맑은 고딕"/>
+              </a:rPr>
+              <a:t>, </a:t>
+            </a:r>
+            <a:r>
+              <a:rPr sz="1500" dirty="0" err="1">
+                <a:solidFill>
+                  <a:srgbClr val="232323"/>
+                </a:solidFill>
+                <a:latin typeface="맑은 고딕"/>
+              </a:rPr>
+              <a:t>기본</a:t>
+            </a:r>
+            <a:r>
+              <a:rPr sz="1500" dirty="0">
+                <a:solidFill>
+                  <a:srgbClr val="232323"/>
+                </a:solidFill>
+                <a:latin typeface="맑은 고딕"/>
+              </a:rPr>
+              <a:t> 120초 </a:t>
+            </a:r>
+            <a:r>
+              <a:rPr sz="1500" dirty="0" err="1">
+                <a:solidFill>
+                  <a:srgbClr val="232323"/>
+                </a:solidFill>
+                <a:latin typeface="맑은 고딕"/>
+              </a:rPr>
+              <a:t>제한</a:t>
+            </a:r>
+            <a:r>
+              <a:rPr sz="1500" dirty="0">
+                <a:solidFill>
+                  <a:srgbClr val="232323"/>
+                </a:solidFill>
+                <a:latin typeface="맑은 고딕"/>
+              </a:rPr>
+              <a:t> </a:t>
+            </a:r>
+            <a:r>
+              <a:rPr sz="1500" dirty="0" err="1">
+                <a:solidFill>
+                  <a:srgbClr val="232323"/>
+                </a:solidFill>
+                <a:latin typeface="맑은 고딕"/>
+              </a:rPr>
+              <a:t>시간</a:t>
+            </a:r>
+            <a:endParaRPr sz="1500" dirty="0">
+              <a:solidFill>
+                <a:srgbClr val="232323"/>
+              </a:solidFill>
+              <a:latin typeface="맑은 고딕"/>
+            </a:endParaRPr>
+          </a:p>
+          <a:p>
+            <a:pPr>
+              <a:spcAft>
+                <a:spcPts val="600"/>
+              </a:spcAft>
+            </a:pPr>
+            <a:r>
+              <a:rPr sz="1500" dirty="0">
+                <a:solidFill>
+                  <a:srgbClr val="232323"/>
+                </a:solidFill>
+                <a:latin typeface="맑은 고딕"/>
+              </a:rPr>
+              <a:t>• </a:t>
+            </a:r>
+            <a:r>
+              <a:rPr sz="1500" dirty="0" err="1">
+                <a:solidFill>
+                  <a:srgbClr val="232323"/>
+                </a:solidFill>
+                <a:latin typeface="맑은 고딕"/>
+              </a:rPr>
+              <a:t>종료</a:t>
+            </a:r>
+            <a:r>
+              <a:rPr sz="1500" dirty="0">
+                <a:solidFill>
+                  <a:srgbClr val="232323"/>
+                </a:solidFill>
+                <a:latin typeface="맑은 고딕"/>
+              </a:rPr>
+              <a:t> 시 </a:t>
+            </a:r>
+            <a:r>
+              <a:rPr sz="1500" dirty="0" err="1">
+                <a:solidFill>
+                  <a:srgbClr val="232323"/>
+                </a:solidFill>
+                <a:latin typeface="맑은 고딕"/>
+              </a:rPr>
+              <a:t>점수</a:t>
+            </a:r>
+            <a:r>
+              <a:rPr sz="1500" dirty="0">
+                <a:solidFill>
+                  <a:srgbClr val="232323"/>
+                </a:solidFill>
+                <a:latin typeface="맑은 고딕"/>
+              </a:rPr>
+              <a:t> </a:t>
+            </a:r>
+            <a:r>
+              <a:rPr sz="1500" dirty="0" err="1">
+                <a:solidFill>
+                  <a:srgbClr val="232323"/>
+                </a:solidFill>
+                <a:latin typeface="맑은 고딕"/>
+              </a:rPr>
+              <a:t>비교</a:t>
+            </a:r>
+            <a:r>
+              <a:rPr sz="1500" dirty="0">
+                <a:solidFill>
+                  <a:srgbClr val="232323"/>
+                </a:solidFill>
+                <a:latin typeface="맑은 고딕"/>
+              </a:rPr>
+              <a:t>, 한 팀 </a:t>
+            </a:r>
+            <a:r>
+              <a:rPr sz="1500" dirty="0" err="1">
+                <a:solidFill>
+                  <a:srgbClr val="232323"/>
+                </a:solidFill>
+                <a:latin typeface="맑은 고딕"/>
+              </a:rPr>
+              <a:t>이탈</a:t>
+            </a:r>
+            <a:r>
+              <a:rPr sz="1500" dirty="0">
+                <a:solidFill>
+                  <a:srgbClr val="232323"/>
+                </a:solidFill>
+                <a:latin typeface="맑은 고딕"/>
+              </a:rPr>
+              <a:t> 시 </a:t>
+            </a:r>
+            <a:r>
+              <a:rPr sz="1500" dirty="0" err="1">
+                <a:solidFill>
+                  <a:srgbClr val="232323"/>
+                </a:solidFill>
+                <a:latin typeface="맑은 고딕"/>
+              </a:rPr>
+              <a:t>기권</a:t>
+            </a:r>
+            <a:r>
+              <a:rPr sz="1500" dirty="0">
+                <a:solidFill>
+                  <a:srgbClr val="232323"/>
+                </a:solidFill>
+                <a:latin typeface="맑은 고딕"/>
+              </a:rPr>
+              <a:t> </a:t>
+            </a:r>
+            <a:r>
+              <a:rPr sz="1500" dirty="0" err="1">
+                <a:solidFill>
+                  <a:srgbClr val="232323"/>
+                </a:solidFill>
+                <a:latin typeface="맑은 고딕"/>
+              </a:rPr>
+              <a:t>승리</a:t>
+            </a:r>
+            <a:r>
+              <a:rPr sz="1500" dirty="0">
+                <a:solidFill>
+                  <a:srgbClr val="232323"/>
+                </a:solidFill>
+                <a:latin typeface="맑은 고딕"/>
+              </a:rPr>
+              <a:t> </a:t>
+            </a:r>
+            <a:r>
+              <a:rPr sz="1500" dirty="0" err="1">
+                <a:solidFill>
+                  <a:srgbClr val="232323"/>
+                </a:solidFill>
+                <a:latin typeface="맑은 고딕"/>
+              </a:rPr>
+              <a:t>처리</a:t>
+            </a:r>
+            <a:endParaRPr sz="1500" dirty="0">
+              <a:solidFill>
+                <a:srgbClr val="232323"/>
+              </a:solidFill>
+              <a:latin typeface="맑은 고딕"/>
+            </a:endParaRPr>
+          </a:p>
+          <a:p>
+            <a:pPr>
+              <a:spcAft>
+                <a:spcPts val="600"/>
+              </a:spcAft>
+            </a:pPr>
+            <a:r>
+              <a:rPr sz="1500" dirty="0">
+                <a:solidFill>
+                  <a:srgbClr val="232323"/>
+                </a:solidFill>
+                <a:latin typeface="맑은 고딕"/>
+              </a:rPr>
+              <a:t>• </a:t>
+            </a:r>
+            <a:r>
+              <a:rPr sz="1500" dirty="0" err="1">
+                <a:solidFill>
+                  <a:srgbClr val="232323"/>
+                </a:solidFill>
+                <a:latin typeface="맑은 고딕"/>
+              </a:rPr>
+              <a:t>사망</a:t>
+            </a:r>
+            <a:r>
+              <a:rPr sz="1500" dirty="0">
+                <a:solidFill>
+                  <a:srgbClr val="232323"/>
+                </a:solidFill>
+                <a:latin typeface="맑은 고딕"/>
+              </a:rPr>
+              <a:t> 후 </a:t>
+            </a:r>
+            <a:r>
+              <a:rPr sz="1500" dirty="0" err="1">
+                <a:solidFill>
+                  <a:srgbClr val="232323"/>
+                </a:solidFill>
+                <a:latin typeface="맑은 고딕"/>
+              </a:rPr>
+              <a:t>기본</a:t>
+            </a:r>
+            <a:r>
+              <a:rPr sz="1500" dirty="0">
+                <a:solidFill>
+                  <a:srgbClr val="232323"/>
+                </a:solidFill>
+                <a:latin typeface="맑은 고딕"/>
+              </a:rPr>
+              <a:t> 3초 </a:t>
+            </a:r>
+            <a:r>
+              <a:rPr sz="1500" dirty="0" err="1">
+                <a:solidFill>
+                  <a:srgbClr val="232323"/>
+                </a:solidFill>
+                <a:latin typeface="맑은 고딕"/>
+              </a:rPr>
+              <a:t>지연</a:t>
+            </a:r>
+            <a:r>
+              <a:rPr sz="1500" dirty="0">
+                <a:solidFill>
+                  <a:srgbClr val="232323"/>
+                </a:solidFill>
+                <a:latin typeface="맑은 고딕"/>
+              </a:rPr>
+              <a:t> </a:t>
+            </a:r>
+            <a:r>
+              <a:rPr sz="1500" dirty="0" err="1">
+                <a:solidFill>
+                  <a:srgbClr val="232323"/>
+                </a:solidFill>
+                <a:latin typeface="맑은 고딕"/>
+              </a:rPr>
+              <a:t>리스폰·팀</a:t>
+            </a:r>
+            <a:r>
+              <a:rPr sz="1500" dirty="0">
+                <a:solidFill>
+                  <a:srgbClr val="232323"/>
+                </a:solidFill>
+                <a:latin typeface="맑은 고딕"/>
+              </a:rPr>
+              <a:t> </a:t>
+            </a:r>
+            <a:r>
+              <a:rPr sz="1500" dirty="0" err="1">
+                <a:solidFill>
+                  <a:srgbClr val="232323"/>
+                </a:solidFill>
+                <a:latin typeface="맑은 고딕"/>
+              </a:rPr>
+              <a:t>유지</a:t>
+            </a:r>
+            <a:endParaRPr sz="1500" dirty="0">
+              <a:solidFill>
+                <a:srgbClr val="232323"/>
+              </a:solidFill>
+              <a:latin typeface="맑은 고딕"/>
+            </a:endParaRPr>
+          </a:p>
+          <a:p>
+            <a:pPr>
+              <a:spcAft>
+                <a:spcPts val="600"/>
+              </a:spcAft>
+            </a:pPr>
+            <a:r>
+              <a:rPr sz="1500" dirty="0">
+                <a:solidFill>
+                  <a:srgbClr val="232323"/>
+                </a:solidFill>
+                <a:latin typeface="맑은 고딕"/>
+              </a:rPr>
+              <a:t>• 팀 </a:t>
+            </a:r>
+            <a:r>
+              <a:rPr sz="1500" dirty="0" err="1">
+                <a:solidFill>
+                  <a:srgbClr val="232323"/>
+                </a:solidFill>
+                <a:latin typeface="맑은 고딕"/>
+              </a:rPr>
+              <a:t>시작점</a:t>
+            </a:r>
+            <a:r>
+              <a:rPr sz="1500" dirty="0">
+                <a:solidFill>
+                  <a:srgbClr val="232323"/>
+                </a:solidFill>
+                <a:latin typeface="맑은 고딕"/>
+              </a:rPr>
+              <a:t> </a:t>
+            </a:r>
+            <a:r>
+              <a:rPr sz="1500" dirty="0" err="1">
+                <a:solidFill>
+                  <a:srgbClr val="232323"/>
+                </a:solidFill>
+                <a:latin typeface="맑은 고딕"/>
+              </a:rPr>
+              <a:t>주변</a:t>
+            </a:r>
+            <a:r>
+              <a:rPr sz="1500" dirty="0">
+                <a:solidFill>
+                  <a:srgbClr val="232323"/>
+                </a:solidFill>
+                <a:latin typeface="맑은 고딕"/>
+              </a:rPr>
+              <a:t> </a:t>
+            </a:r>
+            <a:r>
+              <a:rPr sz="1500" dirty="0" err="1">
+                <a:solidFill>
+                  <a:srgbClr val="232323"/>
+                </a:solidFill>
+                <a:latin typeface="맑은 고딕"/>
+              </a:rPr>
+              <a:t>탐색</a:t>
+            </a:r>
+            <a:r>
+              <a:rPr sz="1500" dirty="0">
+                <a:solidFill>
+                  <a:srgbClr val="232323"/>
+                </a:solidFill>
+                <a:latin typeface="맑은 고딕"/>
+              </a:rPr>
+              <a:t> 및 </a:t>
+            </a:r>
+            <a:r>
+              <a:rPr sz="1500" dirty="0" err="1">
+                <a:solidFill>
+                  <a:srgbClr val="232323"/>
+                </a:solidFill>
+                <a:latin typeface="맑은 고딕"/>
+              </a:rPr>
+              <a:t>혼잡</a:t>
+            </a:r>
+            <a:r>
+              <a:rPr sz="1500" dirty="0">
+                <a:solidFill>
+                  <a:srgbClr val="232323"/>
+                </a:solidFill>
+                <a:latin typeface="맑은 고딕"/>
+              </a:rPr>
+              <a:t> 시 </a:t>
+            </a:r>
+            <a:r>
+              <a:rPr sz="1500" dirty="0" err="1">
+                <a:solidFill>
+                  <a:srgbClr val="232323"/>
+                </a:solidFill>
+                <a:latin typeface="맑은 고딕"/>
+              </a:rPr>
+              <a:t>대기·재시도</a:t>
+            </a:r>
+            <a:endParaRPr sz="1500" dirty="0">
+              <a:solidFill>
+                <a:srgbClr val="232323"/>
+              </a:solidFill>
+              <a:latin typeface="맑은 고딕"/>
+            </a:endParaRPr>
+          </a:p>
+          <a:p>
+            <a:pPr>
+              <a:spcAft>
+                <a:spcPts val="600"/>
+              </a:spcAft>
+            </a:pPr>
+            <a:endParaRPr sz="1500" dirty="0">
+              <a:solidFill>
+                <a:srgbClr val="232323"/>
+              </a:solidFill>
+              <a:latin typeface="맑은 고딕"/>
+            </a:endParaRPr>
+          </a:p>
+          <a:p>
+            <a:pPr>
+              <a:spcAft>
+                <a:spcPts val="600"/>
+              </a:spcAft>
+            </a:pPr>
+            <a:r>
+              <a:rPr sz="1500" dirty="0" err="1">
+                <a:solidFill>
+                  <a:srgbClr val="232323"/>
+                </a:solidFill>
+                <a:latin typeface="맑은 고딕"/>
+              </a:rPr>
+              <a:t>향상된</a:t>
+            </a:r>
+            <a:r>
+              <a:rPr sz="1500" dirty="0">
+                <a:solidFill>
+                  <a:srgbClr val="232323"/>
+                </a:solidFill>
+                <a:latin typeface="맑은 고딕"/>
+              </a:rPr>
+              <a:t> </a:t>
+            </a:r>
+            <a:r>
+              <a:rPr sz="1500" dirty="0" err="1">
+                <a:solidFill>
+                  <a:srgbClr val="232323"/>
+                </a:solidFill>
+                <a:latin typeface="맑은 고딕"/>
+              </a:rPr>
+              <a:t>실무</a:t>
+            </a:r>
+            <a:r>
+              <a:rPr sz="1500" dirty="0">
+                <a:solidFill>
+                  <a:srgbClr val="232323"/>
+                </a:solidFill>
+                <a:latin typeface="맑은 고딕"/>
+              </a:rPr>
+              <a:t> </a:t>
+            </a:r>
+            <a:r>
+              <a:rPr sz="1500" dirty="0" err="1">
+                <a:solidFill>
+                  <a:srgbClr val="232323"/>
+                </a:solidFill>
+                <a:latin typeface="맑은 고딕"/>
+              </a:rPr>
+              <a:t>역량</a:t>
+            </a:r>
+            <a:endParaRPr sz="1500" dirty="0">
+              <a:solidFill>
+                <a:srgbClr val="232323"/>
+              </a:solidFill>
+              <a:latin typeface="맑은 고딕"/>
+            </a:endParaRPr>
+          </a:p>
+          <a:p>
+            <a:pPr>
+              <a:spcAft>
+                <a:spcPts val="600"/>
+              </a:spcAft>
+            </a:pPr>
+            <a:r>
+              <a:rPr sz="1500" dirty="0">
+                <a:solidFill>
+                  <a:srgbClr val="232323"/>
+                </a:solidFill>
+                <a:latin typeface="맑은 고딕"/>
+              </a:rPr>
+              <a:t>• </a:t>
+            </a:r>
+            <a:r>
+              <a:rPr sz="1500" dirty="0" err="1">
+                <a:solidFill>
+                  <a:srgbClr val="232323"/>
+                </a:solidFill>
+                <a:latin typeface="맑은 고딕"/>
+              </a:rPr>
+              <a:t>서버</a:t>
+            </a:r>
+            <a:r>
+              <a:rPr sz="1500" dirty="0">
+                <a:solidFill>
+                  <a:srgbClr val="232323"/>
+                </a:solidFill>
+                <a:latin typeface="맑은 고딕"/>
+              </a:rPr>
+              <a:t> </a:t>
+            </a:r>
+            <a:r>
+              <a:rPr sz="1500" dirty="0" err="1">
+                <a:solidFill>
+                  <a:srgbClr val="232323"/>
+                </a:solidFill>
+                <a:latin typeface="맑은 고딕"/>
+              </a:rPr>
+              <a:t>경기</a:t>
+            </a:r>
+            <a:r>
+              <a:rPr sz="1500" dirty="0">
+                <a:solidFill>
+                  <a:srgbClr val="232323"/>
+                </a:solidFill>
+                <a:latin typeface="맑은 고딕"/>
+              </a:rPr>
+              <a:t> </a:t>
+            </a:r>
+            <a:r>
+              <a:rPr sz="1500" dirty="0" err="1">
+                <a:solidFill>
+                  <a:srgbClr val="232323"/>
+                </a:solidFill>
+                <a:latin typeface="맑은 고딕"/>
+              </a:rPr>
+              <a:t>규칙과</a:t>
+            </a:r>
+            <a:r>
+              <a:rPr sz="1500" dirty="0">
+                <a:solidFill>
+                  <a:srgbClr val="232323"/>
+                </a:solidFill>
+                <a:latin typeface="맑은 고딕"/>
+              </a:rPr>
+              <a:t> </a:t>
+            </a:r>
+            <a:r>
+              <a:rPr sz="1500" dirty="0" err="1">
+                <a:solidFill>
+                  <a:srgbClr val="232323"/>
+                </a:solidFill>
+                <a:latin typeface="맑은 고딕"/>
+              </a:rPr>
+              <a:t>로컬</a:t>
+            </a:r>
+            <a:r>
+              <a:rPr sz="1500" dirty="0">
+                <a:solidFill>
+                  <a:srgbClr val="232323"/>
+                </a:solidFill>
+                <a:latin typeface="맑은 고딕"/>
+              </a:rPr>
+              <a:t> </a:t>
+            </a:r>
+            <a:r>
+              <a:rPr sz="1500" dirty="0" err="1">
+                <a:solidFill>
+                  <a:srgbClr val="232323"/>
+                </a:solidFill>
+                <a:latin typeface="맑은 고딕"/>
+              </a:rPr>
+              <a:t>메뉴·결과</a:t>
+            </a:r>
+            <a:r>
+              <a:rPr sz="1500" dirty="0">
+                <a:solidFill>
+                  <a:srgbClr val="232323"/>
+                </a:solidFill>
+                <a:latin typeface="맑은 고딕"/>
+              </a:rPr>
+              <a:t> </a:t>
+            </a:r>
+            <a:r>
+              <a:rPr sz="1500" dirty="0" err="1">
+                <a:solidFill>
+                  <a:srgbClr val="232323"/>
+                </a:solidFill>
+                <a:latin typeface="맑은 고딕"/>
+              </a:rPr>
+              <a:t>표시</a:t>
+            </a:r>
+            <a:r>
+              <a:rPr sz="1500" dirty="0">
+                <a:solidFill>
+                  <a:srgbClr val="232323"/>
+                </a:solidFill>
+                <a:latin typeface="맑은 고딕"/>
+              </a:rPr>
+              <a:t> </a:t>
+            </a:r>
+            <a:r>
+              <a:rPr sz="1500" dirty="0" err="1">
+                <a:solidFill>
+                  <a:srgbClr val="232323"/>
+                </a:solidFill>
+                <a:latin typeface="맑은 고딕"/>
+              </a:rPr>
+              <a:t>분리</a:t>
+            </a:r>
+            <a:endParaRPr sz="1500" dirty="0">
+              <a:solidFill>
+                <a:srgbClr val="232323"/>
+              </a:solidFill>
+              <a:latin typeface="맑은 고딕"/>
+            </a:endParaRPr>
+          </a:p>
+          <a:p>
+            <a:pPr>
+              <a:spcAft>
+                <a:spcPts val="600"/>
+              </a:spcAft>
+            </a:pPr>
+            <a:r>
+              <a:rPr sz="1500" dirty="0">
+                <a:solidFill>
+                  <a:srgbClr val="232323"/>
+                </a:solidFill>
+                <a:latin typeface="맑은 고딕"/>
+              </a:rPr>
+              <a:t>• </a:t>
+            </a:r>
+            <a:r>
+              <a:rPr sz="1500" dirty="0" err="1">
+                <a:solidFill>
+                  <a:srgbClr val="232323"/>
+                </a:solidFill>
+                <a:latin typeface="맑은 고딕"/>
+              </a:rPr>
+              <a:t>지연</a:t>
+            </a:r>
+            <a:r>
+              <a:rPr sz="1500" dirty="0">
+                <a:solidFill>
+                  <a:srgbClr val="232323"/>
+                </a:solidFill>
+                <a:latin typeface="맑은 고딕"/>
+              </a:rPr>
+              <a:t> </a:t>
+            </a:r>
+            <a:r>
+              <a:rPr sz="1500" dirty="0" err="1">
+                <a:solidFill>
+                  <a:srgbClr val="232323"/>
+                </a:solidFill>
+                <a:latin typeface="맑은 고딕"/>
+              </a:rPr>
+              <a:t>작업·Pawn</a:t>
+            </a:r>
+            <a:r>
+              <a:rPr sz="1500" dirty="0">
+                <a:solidFill>
+                  <a:srgbClr val="232323"/>
+                </a:solidFill>
+                <a:latin typeface="맑은 고딕"/>
+              </a:rPr>
+              <a:t> </a:t>
+            </a:r>
+            <a:r>
+              <a:rPr sz="1500" dirty="0" err="1">
+                <a:solidFill>
+                  <a:srgbClr val="232323"/>
+                </a:solidFill>
+                <a:latin typeface="맑은 고딕"/>
+              </a:rPr>
+              <a:t>교체·팀</a:t>
+            </a:r>
+            <a:r>
+              <a:rPr sz="1500" dirty="0">
+                <a:solidFill>
+                  <a:srgbClr val="232323"/>
+                </a:solidFill>
+                <a:latin typeface="맑은 고딕"/>
+              </a:rPr>
+              <a:t> </a:t>
+            </a:r>
+            <a:r>
+              <a:rPr sz="1500" dirty="0" err="1">
+                <a:solidFill>
+                  <a:srgbClr val="232323"/>
+                </a:solidFill>
+                <a:latin typeface="맑은 고딕"/>
+              </a:rPr>
+              <a:t>유지</a:t>
+            </a:r>
+            <a:r>
+              <a:rPr sz="1500" dirty="0">
+                <a:solidFill>
+                  <a:srgbClr val="232323"/>
+                </a:solidFill>
+                <a:latin typeface="맑은 고딕"/>
+              </a:rPr>
+              <a:t> </a:t>
+            </a:r>
+            <a:r>
+              <a:rPr sz="1500" dirty="0" err="1">
+                <a:solidFill>
+                  <a:srgbClr val="232323"/>
+                </a:solidFill>
+                <a:latin typeface="맑은 고딕"/>
+              </a:rPr>
+              <a:t>상태의</a:t>
+            </a:r>
+            <a:r>
+              <a:rPr sz="1500" dirty="0">
+                <a:solidFill>
+                  <a:srgbClr val="232323"/>
+                </a:solidFill>
+                <a:latin typeface="맑은 고딕"/>
+              </a:rPr>
+              <a:t> </a:t>
+            </a:r>
+            <a:r>
+              <a:rPr sz="1500" dirty="0" err="1">
+                <a:solidFill>
+                  <a:srgbClr val="232323"/>
+                </a:solidFill>
+                <a:latin typeface="맑은 고딕"/>
+              </a:rPr>
+              <a:t>수명</a:t>
+            </a:r>
+            <a:r>
+              <a:rPr sz="1500" dirty="0">
+                <a:solidFill>
+                  <a:srgbClr val="232323"/>
+                </a:solidFill>
+                <a:latin typeface="맑은 고딕"/>
+              </a:rPr>
+              <a:t> </a:t>
+            </a:r>
+            <a:r>
+              <a:rPr sz="1500" dirty="0" err="1">
+                <a:solidFill>
+                  <a:srgbClr val="232323"/>
+                </a:solidFill>
+                <a:latin typeface="맑은 고딕"/>
+              </a:rPr>
+              <a:t>관리</a:t>
+            </a:r>
+            <a:endParaRPr sz="1500" dirty="0">
+              <a:solidFill>
+                <a:srgbClr val="232323"/>
+              </a:solidFill>
+              <a:latin typeface="맑은 고딕"/>
+            </a:endParaRPr>
+          </a:p>
+          <a:p>
+            <a:pPr>
+              <a:spcAft>
+                <a:spcPts val="600"/>
+              </a:spcAft>
+            </a:pPr>
+            <a:r>
+              <a:rPr sz="1500" dirty="0">
+                <a:solidFill>
+                  <a:srgbClr val="232323"/>
+                </a:solidFill>
+                <a:latin typeface="맑은 고딕"/>
+              </a:rPr>
+              <a:t>• </a:t>
+            </a:r>
+            <a:r>
+              <a:rPr sz="1500" dirty="0" err="1">
+                <a:solidFill>
+                  <a:srgbClr val="232323"/>
+                </a:solidFill>
+                <a:latin typeface="맑은 고딕"/>
+              </a:rPr>
+              <a:t>종료·재경기</a:t>
+            </a:r>
+            <a:r>
+              <a:rPr sz="1500" dirty="0">
+                <a:solidFill>
+                  <a:srgbClr val="232323"/>
+                </a:solidFill>
+                <a:latin typeface="맑은 고딕"/>
+              </a:rPr>
+              <a:t> </a:t>
+            </a:r>
+            <a:r>
+              <a:rPr sz="1500" dirty="0" err="1">
+                <a:solidFill>
+                  <a:srgbClr val="232323"/>
+                </a:solidFill>
+                <a:latin typeface="맑은 고딕"/>
+              </a:rPr>
+              <a:t>전환에</a:t>
+            </a:r>
+            <a:r>
+              <a:rPr sz="1500" dirty="0">
+                <a:solidFill>
+                  <a:srgbClr val="232323"/>
+                </a:solidFill>
+                <a:latin typeface="맑은 고딕"/>
+              </a:rPr>
+              <a:t> </a:t>
+            </a:r>
+            <a:r>
+              <a:rPr sz="1500" dirty="0" err="1">
+                <a:solidFill>
+                  <a:srgbClr val="232323"/>
+                </a:solidFill>
+                <a:latin typeface="맑은 고딕"/>
+              </a:rPr>
+              <a:t>필요한</a:t>
+            </a:r>
+            <a:r>
+              <a:rPr sz="1500" dirty="0">
+                <a:solidFill>
+                  <a:srgbClr val="232323"/>
+                </a:solidFill>
+                <a:latin typeface="맑은 고딕"/>
+              </a:rPr>
+              <a:t> </a:t>
+            </a:r>
+            <a:r>
+              <a:rPr sz="1500" dirty="0" err="1">
+                <a:solidFill>
+                  <a:srgbClr val="232323"/>
+                </a:solidFill>
+                <a:latin typeface="맑은 고딕"/>
+              </a:rPr>
+              <a:t>초기화</a:t>
+            </a:r>
+            <a:r>
+              <a:rPr sz="1500" dirty="0">
+                <a:solidFill>
+                  <a:srgbClr val="232323"/>
+                </a:solidFill>
+                <a:latin typeface="맑은 고딕"/>
+              </a:rPr>
+              <a:t> </a:t>
+            </a:r>
+            <a:r>
+              <a:rPr sz="1500" dirty="0" err="1">
+                <a:solidFill>
+                  <a:srgbClr val="232323"/>
+                </a:solidFill>
+                <a:latin typeface="맑은 고딕"/>
+              </a:rPr>
+              <a:t>범위</a:t>
+            </a:r>
+            <a:r>
+              <a:rPr sz="1500" dirty="0">
+                <a:solidFill>
+                  <a:srgbClr val="232323"/>
+                </a:solidFill>
+                <a:latin typeface="맑은 고딕"/>
+              </a:rPr>
+              <a:t> </a:t>
+            </a:r>
+            <a:r>
+              <a:rPr sz="1500" dirty="0" err="1">
+                <a:solidFill>
+                  <a:srgbClr val="232323"/>
+                </a:solidFill>
+                <a:latin typeface="맑은 고딕"/>
+              </a:rPr>
+              <a:t>식별</a:t>
+            </a:r>
+            <a:endParaRPr sz="1500" dirty="0">
+              <a:solidFill>
+                <a:srgbClr val="232323"/>
+              </a:solidFill>
+              <a:latin typeface="맑은 고딕"/>
+            </a:endParaRPr>
+          </a:p>
+          <a:p>
+            <a:pPr>
+              <a:spcAft>
+                <a:spcPts val="600"/>
+              </a:spcAft>
+            </a:pPr>
+            <a:endParaRPr sz="1500" dirty="0">
+              <a:solidFill>
+                <a:srgbClr val="232323"/>
+              </a:solidFill>
+              <a:latin typeface="맑은 고딕"/>
+            </a:endParaRPr>
+          </a:p>
+        </p:txBody>
+      </p:sp>
+    </p:spTree>
+  </p:cSld>
+  <p:clrMapOvr>
+    <a:masterClrMapping/>
+  </p:clrMapOvr>
+</p:sld>
+</file>
+
+<file path=ppt/slides/slide14.xml><?xml version="1.0" encoding="utf-8"?>
+<p:sld xmlns:a="http://schemas.openxmlformats.org/drawingml/2006/main" xmlns:r="http://schemas.openxmlformats.org/officeDocument/2006/relationships" xmlns:p="http://schemas.openxmlformats.org/presentationml/2006/main">
+  <p:cSld>
+    <p:spTree>
+      <p:nvGrpSpPr>
+        <p:cNvPr id="1" name=""/>
+        <p:cNvGrpSpPr/>
+        <p:nvPr/>
+      </p:nvGrpSpPr>
+      <p:grpSpPr>
+        <a:xfrm>
+          <a:off x="0" y="0"/>
+          <a:ext cx="0" cy="0"/>
+          <a:chOff x="0" y="0"/>
+          <a:chExt cx="0" cy="0"/>
+        </a:xfrm>
+      </p:grpSpPr>
+      <p:sp>
+        <p:nvSpPr>
+          <p:cNvPr id="2" name="TextBox 5">
+            <a:extLst>
+              <a:ext uri="{FF2B5EF4-FFF2-40B4-BE49-F238E27FC236}">
+                <a16:creationId xmlns:a16="http://schemas.microsoft.com/office/drawing/2014/main" id="{E8AC05D6-54D6-2952-91A3-3178575C30B8}"/>
+              </a:ext>
+            </a:extLst>
+          </p:cNvPr>
+          <p:cNvSpPr txBox="1">
+            <a:spLocks noChangeArrowheads="1"/>
+          </p:cNvSpPr>
+          <p:nvPr/>
+        </p:nvSpPr>
+        <p:spPr bwMode="auto">
+          <a:xfrm>
+            <a:off x="10565314" y="6411160"/>
+            <a:ext cx="1520825" cy="292100"/>
+          </a:xfrm>
+          <a:prstGeom prst="rect">
+            <a:avLst/>
+          </a:prstGeom>
+          <a:noFill/>
+          <a:ln>
+            <a:noFill/>
+          </a:ln>
+        </p:spPr>
+        <p:txBody>
+          <a:bodyPr wrap="none" lIns="91431" tIns="45715" rIns="91431" bIns="45715">
+            <a:spAutoFit/>
+          </a:bodyPr>
+          <a:lstStyle/>
+          <a:p>
+            <a:pPr marL="0" marR="0" lvl="0" indent="0" algn="ctr" defTabSz="914400" rtl="0" eaLnBrk="1" fontAlgn="auto" latinLnBrk="1" hangingPunct="1">
+              <a:lnSpc>
+                <a:spcPct val="100000"/>
+              </a:lnSpc>
+              <a:spcBef>
+                <a:spcPts val="0"/>
+              </a:spcBef>
+              <a:spcAft>
+                <a:spcPts val="0"/>
+              </a:spcAft>
+              <a:buClrTx/>
+              <a:buSzTx/>
+              <a:buFontTx/>
+              <a:buNone/>
+              <a:tabLst/>
+              <a:defRPr/>
+            </a:pPr>
+            <a:r>
+              <a:rPr kumimoji="0" lang="en-US" altLang="ko-KR" sz="1300" b="0" i="0" u="sng" strike="noStrike" kern="1200" cap="none" spc="0" normalizeH="0" baseline="0" noProof="0" dirty="0">
+                <a:ln>
+                  <a:solidFill>
+                    <a:srgbClr val="4F81BD">
+                      <a:alpha val="0"/>
+                    </a:srgbClr>
+                  </a:solidFill>
+                </a:ln>
+                <a:solidFill>
+                  <a:prstClr val="white">
+                    <a:lumMod val="50000"/>
+                  </a:prstClr>
+                </a:solidFill>
+                <a:effectLst/>
+                <a:uLnTx/>
+                <a:uFillTx/>
+                <a:latin typeface="맑은 고딕"/>
+                <a:ea typeface="맑은 고딕" panose="020B0503020000020004" pitchFamily="50" charset="-127"/>
+                <a:cs typeface="+mn-cs"/>
+              </a:rPr>
+              <a:t>End of Document</a:t>
+            </a:r>
+            <a:endParaRPr kumimoji="0" lang="ko-KR" altLang="en-US" sz="1300" b="0" i="0" u="sng" strike="noStrike" kern="1200" cap="none" spc="0" normalizeH="0" baseline="0" noProof="0" dirty="0">
+              <a:ln>
+                <a:solidFill>
+                  <a:srgbClr val="4F81BD">
+                    <a:alpha val="0"/>
+                  </a:srgbClr>
+                </a:solidFill>
+              </a:ln>
+              <a:solidFill>
+                <a:prstClr val="white">
+                  <a:lumMod val="50000"/>
+                </a:prstClr>
+              </a:solidFill>
+              <a:effectLst/>
+              <a:uLnTx/>
+              <a:uFillTx/>
+              <a:latin typeface="맑은 고딕"/>
+              <a:ea typeface="맑은 고딕" panose="020B0503020000020004" pitchFamily="50" charset="-127"/>
+              <a:cs typeface="+mn-cs"/>
+            </a:endParaRPr>
+          </a:p>
+        </p:txBody>
+      </p:sp>
+    </p:spTree>
+    <p:extLst>
+      <p:ext uri="{BB962C8B-B14F-4D97-AF65-F5344CB8AC3E}">
+        <p14:creationId xmlns:p14="http://schemas.microsoft.com/office/powerpoint/2010/main" val="3047833007"/>
+      </p:ext>
+    </p:extLst>
+  </p:cSld>
+  <p:clrMapOvr>
+    <a:masterClrMapping/>
+  </p:clrMapOvr>
+</p:sld>
+</file>
+
 <file path=ppt/slides/slide2.xml><?xml version="1.0" encoding="utf-8"?>
 <p:sld xmlns:a="http://schemas.openxmlformats.org/drawingml/2006/main" xmlns:r="http://schemas.openxmlformats.org/officeDocument/2006/relationships" xmlns:p="http://schemas.openxmlformats.org/presentationml/2006/main">
   <p:cSld>
@@ -7636,7 +9688,7 @@
         <p:spPr>
           <a:xfrm>
             <a:off x="690495" y="2102345"/>
-            <a:ext cx="10233097" cy="523220"/>
+            <a:ext cx="10233097" cy="3170099"/>
           </a:xfrm>
           <a:prstGeom prst="rect">
             <a:avLst/>
@@ -7652,6 +9704,478 @@
             <a:pPr marL="285750" indent="-285750">
               <a:buFontTx/>
               <a:buChar char="-"/>
+            </a:pPr>
+            <a:r>
+              <a:rPr lang="ko-KR" altLang="en-US" sz="1400" dirty="0"/>
+              <a:t>아키텍처</a:t>
+            </a:r>
+            <a:endParaRPr lang="en-US" altLang="ko-KR" sz="1400" dirty="0"/>
+          </a:p>
+          <a:p>
+            <a:pPr marL="800100" lvl="1" indent="-342900">
+              <a:buFont typeface="Arial" panose="020B0604020202020204" pitchFamily="34" charset="0"/>
+              <a:buChar char="•"/>
+            </a:pPr>
+            <a:r>
+              <a:rPr lang="en-US" altLang="ko-KR" sz="1400" dirty="0"/>
+              <a:t>C++</a:t>
+            </a:r>
+            <a:r>
+              <a:rPr lang="ko-KR" altLang="en-US" sz="1400" dirty="0"/>
+              <a:t> 핵심 기능과 </a:t>
+            </a:r>
+            <a:r>
+              <a:rPr lang="en-US" altLang="ko-KR" sz="1400" dirty="0"/>
+              <a:t>Blueprint </a:t>
+            </a:r>
+            <a:r>
+              <a:rPr lang="ko-KR" altLang="en-US" sz="1400" dirty="0"/>
+              <a:t>시각적 효과 및 설정 분리</a:t>
+            </a:r>
+            <a:endParaRPr lang="en-US" altLang="ko-KR" sz="1400" dirty="0"/>
+          </a:p>
+          <a:p>
+            <a:pPr marL="800100" lvl="1" indent="-342900">
+              <a:buFont typeface="Arial" panose="020B0604020202020204" pitchFamily="34" charset="0"/>
+              <a:buChar char="•"/>
+            </a:pPr>
+            <a:r>
+              <a:rPr lang="en-US" altLang="ko-KR" sz="1400" dirty="0" err="1"/>
+              <a:t>ZCharacterBase</a:t>
+            </a:r>
+            <a:r>
+              <a:rPr lang="en-US" altLang="ko-KR" sz="1400" dirty="0"/>
+              <a:t> -&gt; </a:t>
+            </a:r>
+            <a:r>
+              <a:rPr lang="en-US" altLang="ko-KR" sz="1400" dirty="0" err="1"/>
+              <a:t>ZCharacterMulti</a:t>
+            </a:r>
+            <a:r>
+              <a:rPr lang="en-US" altLang="ko-KR" sz="1400" dirty="0"/>
+              <a:t> -&gt; </a:t>
+            </a:r>
+            <a:r>
+              <a:rPr lang="en-US" altLang="ko-KR" sz="1400" dirty="0" err="1"/>
+              <a:t>ZCharcterFPS</a:t>
+            </a:r>
+            <a:r>
+              <a:rPr lang="ko-KR" altLang="en-US" sz="1400" dirty="0"/>
+              <a:t> </a:t>
+            </a:r>
+            <a:r>
+              <a:rPr lang="en-US" altLang="ko-KR" sz="1400" dirty="0"/>
+              <a:t>,</a:t>
+            </a:r>
+            <a:r>
+              <a:rPr lang="ko-KR" altLang="en-US" sz="1400" dirty="0"/>
+              <a:t> </a:t>
+            </a:r>
+            <a:r>
+              <a:rPr lang="en-US" altLang="ko-KR" sz="1400" dirty="0" err="1"/>
+              <a:t>ZCharacterTPS</a:t>
+            </a:r>
+            <a:r>
+              <a:rPr lang="ko-KR" altLang="en-US" sz="1400" dirty="0"/>
+              <a:t> </a:t>
+            </a:r>
+            <a:r>
+              <a:rPr lang="en-US" altLang="ko-KR" sz="1400" dirty="0"/>
+              <a:t>(1</a:t>
+            </a:r>
+            <a:r>
+              <a:rPr lang="ko-KR" altLang="en-US" sz="1400" dirty="0"/>
+              <a:t>인칭과 기존 사용하는 </a:t>
+            </a:r>
+            <a:r>
+              <a:rPr lang="en-US" altLang="ko-KR" sz="1400" dirty="0"/>
+              <a:t>3</a:t>
+            </a:r>
+            <a:r>
+              <a:rPr lang="ko-KR" altLang="en-US" sz="1400" dirty="0"/>
+              <a:t>인칭을 분리</a:t>
+            </a:r>
+            <a:r>
+              <a:rPr lang="en-US" altLang="ko-KR" sz="1400" dirty="0"/>
+              <a:t>) </a:t>
+            </a:r>
+            <a:r>
+              <a:rPr lang="ko-KR" altLang="en-US" sz="1400" dirty="0"/>
+              <a:t>기존 코드 재사용</a:t>
+            </a:r>
+            <a:endParaRPr lang="en-US" altLang="ko-KR" sz="1400" dirty="0"/>
+          </a:p>
+          <a:p>
+            <a:pPr marL="742950" lvl="1" indent="-285750">
+              <a:spcAft>
+                <a:spcPts val="600"/>
+              </a:spcAft>
+              <a:buFont typeface="Arial" panose="020B0604020202020204" pitchFamily="34" charset="0"/>
+              <a:buChar char="•"/>
+            </a:pPr>
+            <a:r>
+              <a:rPr lang="en-US" altLang="ko-KR" sz="1400" dirty="0" err="1">
+                <a:solidFill>
+                  <a:srgbClr val="232323"/>
+                </a:solidFill>
+              </a:rPr>
+              <a:t>MultiGameMode</a:t>
+            </a:r>
+            <a:r>
+              <a:rPr lang="en-US" altLang="ko-KR" sz="1400" dirty="0">
+                <a:solidFill>
+                  <a:srgbClr val="232323"/>
+                </a:solidFill>
+              </a:rPr>
+              <a:t>: </a:t>
+            </a:r>
+            <a:r>
+              <a:rPr lang="ko-KR" altLang="en-US" sz="1400" dirty="0">
+                <a:solidFill>
+                  <a:srgbClr val="232323"/>
+                </a:solidFill>
+              </a:rPr>
+              <a:t>서버 팀 승인</a:t>
+            </a:r>
+            <a:r>
+              <a:rPr lang="en-US" altLang="ko-KR" sz="1400" dirty="0">
+                <a:solidFill>
+                  <a:srgbClr val="232323"/>
+                </a:solidFill>
+              </a:rPr>
+              <a:t>·</a:t>
+            </a:r>
+            <a:r>
+              <a:rPr lang="ko-KR" altLang="en-US" sz="1400" dirty="0" err="1">
+                <a:solidFill>
+                  <a:srgbClr val="232323"/>
+                </a:solidFill>
+              </a:rPr>
+              <a:t>스폰</a:t>
+            </a:r>
+            <a:r>
+              <a:rPr lang="en-US" altLang="ko-KR" sz="1400" dirty="0">
+                <a:solidFill>
+                  <a:srgbClr val="232323"/>
+                </a:solidFill>
+              </a:rPr>
+              <a:t>·</a:t>
+            </a:r>
+            <a:r>
+              <a:rPr lang="ko-KR" altLang="en-US" sz="1400" dirty="0">
+                <a:solidFill>
+                  <a:srgbClr val="232323"/>
+                </a:solidFill>
+              </a:rPr>
+              <a:t>점수</a:t>
+            </a:r>
+            <a:r>
+              <a:rPr lang="en-US" altLang="ko-KR" sz="1400" dirty="0">
+                <a:solidFill>
+                  <a:srgbClr val="232323"/>
+                </a:solidFill>
+              </a:rPr>
+              <a:t>·</a:t>
+            </a:r>
+            <a:r>
+              <a:rPr lang="ko-KR" altLang="en-US" sz="1400" dirty="0">
+                <a:solidFill>
+                  <a:srgbClr val="232323"/>
+                </a:solidFill>
+              </a:rPr>
+              <a:t>경기 규칙</a:t>
+            </a:r>
+          </a:p>
+          <a:p>
+            <a:pPr marL="742950" lvl="1" indent="-285750">
+              <a:spcAft>
+                <a:spcPts val="600"/>
+              </a:spcAft>
+              <a:buFont typeface="Arial" panose="020B0604020202020204" pitchFamily="34" charset="0"/>
+              <a:buChar char="•"/>
+            </a:pPr>
+            <a:r>
+              <a:rPr lang="en-US" altLang="ko-KR" sz="1400" dirty="0" err="1">
+                <a:solidFill>
+                  <a:srgbClr val="232323"/>
+                </a:solidFill>
+              </a:rPr>
+              <a:t>MultiGameState</a:t>
+            </a:r>
+            <a:r>
+              <a:rPr lang="en-US" altLang="ko-KR" sz="1400" dirty="0">
+                <a:solidFill>
+                  <a:srgbClr val="232323"/>
+                </a:solidFill>
+              </a:rPr>
+              <a:t>: </a:t>
+            </a:r>
+            <a:r>
+              <a:rPr lang="ko-KR" altLang="en-US" sz="1400" dirty="0">
+                <a:solidFill>
+                  <a:srgbClr val="232323"/>
+                </a:solidFill>
+              </a:rPr>
+              <a:t>팀 점수</a:t>
+            </a:r>
+            <a:r>
+              <a:rPr lang="en-US" altLang="ko-KR" sz="1400" dirty="0">
+                <a:solidFill>
+                  <a:srgbClr val="232323"/>
+                </a:solidFill>
+              </a:rPr>
+              <a:t>·</a:t>
+            </a:r>
+            <a:r>
+              <a:rPr lang="ko-KR" altLang="en-US" sz="1400" dirty="0">
+                <a:solidFill>
+                  <a:srgbClr val="232323"/>
+                </a:solidFill>
+              </a:rPr>
+              <a:t>시간</a:t>
+            </a:r>
+            <a:r>
+              <a:rPr lang="en-US" altLang="ko-KR" sz="1400" dirty="0">
+                <a:solidFill>
+                  <a:srgbClr val="232323"/>
+                </a:solidFill>
+              </a:rPr>
+              <a:t>·</a:t>
+            </a:r>
+            <a:r>
+              <a:rPr lang="ko-KR" altLang="en-US" sz="1400" dirty="0">
+                <a:solidFill>
+                  <a:srgbClr val="232323"/>
+                </a:solidFill>
+              </a:rPr>
+              <a:t>경기 단계 복제</a:t>
+            </a:r>
+          </a:p>
+          <a:p>
+            <a:pPr marL="742950" lvl="1" indent="-285750">
+              <a:spcAft>
+                <a:spcPts val="600"/>
+              </a:spcAft>
+              <a:buFont typeface="Arial" panose="020B0604020202020204" pitchFamily="34" charset="0"/>
+              <a:buChar char="•"/>
+            </a:pPr>
+            <a:r>
+              <a:rPr lang="en-US" altLang="ko-KR" sz="1400" dirty="0" err="1">
+                <a:solidFill>
+                  <a:srgbClr val="232323"/>
+                </a:solidFill>
+              </a:rPr>
+              <a:t>MultiPlayerState</a:t>
+            </a:r>
+            <a:r>
+              <a:rPr lang="en-US" altLang="ko-KR" sz="1400" dirty="0">
+                <a:solidFill>
+                  <a:srgbClr val="232323"/>
+                </a:solidFill>
+              </a:rPr>
+              <a:t>: </a:t>
+            </a:r>
+            <a:r>
+              <a:rPr lang="ko-KR" altLang="en-US" sz="1400" dirty="0">
+                <a:solidFill>
+                  <a:srgbClr val="232323"/>
+                </a:solidFill>
+              </a:rPr>
+              <a:t>팀 소속 보관</a:t>
+            </a:r>
+            <a:r>
+              <a:rPr lang="en-US" altLang="ko-KR" sz="1400" dirty="0">
+                <a:solidFill>
+                  <a:srgbClr val="232323"/>
+                </a:solidFill>
+              </a:rPr>
+              <a:t>·</a:t>
+            </a:r>
+            <a:r>
+              <a:rPr lang="ko-KR" altLang="en-US" sz="1400" dirty="0">
+                <a:solidFill>
+                  <a:srgbClr val="232323"/>
+                </a:solidFill>
+              </a:rPr>
+              <a:t>복제</a:t>
+            </a:r>
+          </a:p>
+          <a:p>
+            <a:pPr marL="742950" lvl="1" indent="-285750">
+              <a:spcAft>
+                <a:spcPts val="600"/>
+              </a:spcAft>
+              <a:buFont typeface="Arial" panose="020B0604020202020204" pitchFamily="34" charset="0"/>
+              <a:buChar char="•"/>
+            </a:pPr>
+            <a:r>
+              <a:rPr lang="en-US" altLang="ko-KR" sz="1400" dirty="0" err="1">
+                <a:solidFill>
+                  <a:srgbClr val="232323"/>
+                </a:solidFill>
+              </a:rPr>
+              <a:t>MultiPlayerController</a:t>
+            </a:r>
+            <a:r>
+              <a:rPr lang="en-US" altLang="ko-KR" sz="1400" dirty="0">
+                <a:solidFill>
+                  <a:srgbClr val="232323"/>
+                </a:solidFill>
+              </a:rPr>
+              <a:t>: </a:t>
+            </a:r>
+            <a:r>
+              <a:rPr lang="ko-KR" altLang="en-US" sz="1400" dirty="0">
+                <a:solidFill>
+                  <a:srgbClr val="232323"/>
+                </a:solidFill>
+              </a:rPr>
+              <a:t>서버 요청</a:t>
+            </a:r>
+            <a:r>
+              <a:rPr lang="en-US" altLang="ko-KR" sz="1400" dirty="0">
+                <a:solidFill>
+                  <a:srgbClr val="232323"/>
+                </a:solidFill>
+              </a:rPr>
+              <a:t>·</a:t>
+            </a:r>
+            <a:r>
+              <a:rPr lang="ko-KR" altLang="en-US" sz="1400" dirty="0">
+                <a:solidFill>
+                  <a:srgbClr val="232323"/>
+                </a:solidFill>
+              </a:rPr>
+              <a:t>로컬 </a:t>
+            </a:r>
+            <a:r>
+              <a:rPr lang="en-US" altLang="ko-KR" sz="1400" dirty="0">
+                <a:solidFill>
+                  <a:srgbClr val="232323"/>
+                </a:solidFill>
+              </a:rPr>
+              <a:t>HUD·</a:t>
+            </a:r>
+            <a:r>
+              <a:rPr lang="ko-KR" altLang="en-US" sz="1400" dirty="0">
+                <a:solidFill>
+                  <a:srgbClr val="232323"/>
+                </a:solidFill>
+              </a:rPr>
+              <a:t>메뉴</a:t>
+            </a:r>
+          </a:p>
+          <a:p>
+            <a:pPr marL="742950" lvl="1" indent="-285750">
+              <a:spcAft>
+                <a:spcPts val="600"/>
+              </a:spcAft>
+              <a:buFont typeface="Arial" panose="020B0604020202020204" pitchFamily="34" charset="0"/>
+              <a:buChar char="•"/>
+            </a:pPr>
+            <a:r>
+              <a:rPr lang="en-US" altLang="ko-KR" sz="1400" dirty="0" err="1">
+                <a:solidFill>
+                  <a:srgbClr val="232323"/>
+                </a:solidFill>
+              </a:rPr>
+              <a:t>WeaponDataAsset</a:t>
+            </a:r>
+            <a:r>
+              <a:rPr lang="en-US" altLang="ko-KR" sz="1400" dirty="0">
+                <a:solidFill>
+                  <a:srgbClr val="232323"/>
+                </a:solidFill>
+              </a:rPr>
+              <a:t>: </a:t>
+            </a:r>
+            <a:r>
+              <a:rPr lang="ko-KR" altLang="en-US" sz="1400" dirty="0">
+                <a:solidFill>
+                  <a:srgbClr val="232323"/>
+                </a:solidFill>
+              </a:rPr>
+              <a:t>무기 기본 설정 </a:t>
+            </a:r>
+            <a:r>
+              <a:rPr lang="en-US" altLang="ko-KR" sz="1400" dirty="0">
+                <a:solidFill>
+                  <a:srgbClr val="232323"/>
+                </a:solidFill>
+              </a:rPr>
+              <a:t>/ </a:t>
+            </a:r>
+            <a:r>
+              <a:rPr lang="ko-KR" altLang="en-US" sz="1400" dirty="0">
+                <a:solidFill>
+                  <a:srgbClr val="232323"/>
+                </a:solidFill>
+              </a:rPr>
+              <a:t>캐릭터</a:t>
+            </a:r>
+            <a:r>
+              <a:rPr lang="en-US" altLang="ko-KR" sz="1400" dirty="0">
+                <a:solidFill>
+                  <a:srgbClr val="232323"/>
+                </a:solidFill>
+              </a:rPr>
+              <a:t>: </a:t>
+            </a:r>
+            <a:r>
+              <a:rPr lang="ko-KR" altLang="en-US" sz="1400" dirty="0">
+                <a:solidFill>
+                  <a:srgbClr val="232323"/>
+                </a:solidFill>
+              </a:rPr>
+              <a:t>실행 상태</a:t>
+            </a:r>
+          </a:p>
+          <a:p>
+            <a:pPr marL="742950" lvl="1" indent="-285750">
+              <a:spcAft>
+                <a:spcPts val="600"/>
+              </a:spcAft>
+              <a:buFont typeface="Arial" panose="020B0604020202020204" pitchFamily="34" charset="0"/>
+              <a:buChar char="•"/>
+            </a:pPr>
+            <a:r>
+              <a:rPr lang="en-US" altLang="ko-KR" sz="1400" dirty="0">
+                <a:solidFill>
+                  <a:srgbClr val="232323"/>
+                </a:solidFill>
+              </a:rPr>
+              <a:t>Projectile / </a:t>
+            </a:r>
+            <a:r>
+              <a:rPr lang="en-US" altLang="ko-KR" sz="1400" dirty="0" err="1">
+                <a:solidFill>
+                  <a:srgbClr val="232323"/>
+                </a:solidFill>
+              </a:rPr>
+              <a:t>ActorPoolSubsystem</a:t>
+            </a:r>
+            <a:r>
+              <a:rPr lang="en-US" altLang="ko-KR" sz="1400" dirty="0">
+                <a:solidFill>
+                  <a:srgbClr val="232323"/>
+                </a:solidFill>
+              </a:rPr>
+              <a:t>: </a:t>
+            </a:r>
+            <a:r>
+              <a:rPr lang="ko-KR" altLang="en-US" sz="1400" dirty="0">
+                <a:solidFill>
+                  <a:srgbClr val="232323"/>
+                </a:solidFill>
+              </a:rPr>
+              <a:t>충돌 처리와 객체 재사용</a:t>
+            </a:r>
+            <a:endParaRPr lang="en-US" altLang="ko-KR" sz="1400" dirty="0"/>
+          </a:p>
+          <a:p>
+            <a:pPr marL="800100" lvl="1" indent="-342900">
+              <a:buFont typeface="Arial" panose="020B0604020202020204" pitchFamily="34" charset="0"/>
+              <a:buChar char="•"/>
             </a:pPr>
             <a:endParaRPr lang="en-US" altLang="ko-KR" sz="1400" dirty="0"/>
           </a:p>
@@ -7696,106 +10220,1263 @@
       </p:grpSpPr>
       <p:sp>
         <p:nvSpPr>
-          <p:cNvPr id="2" name="TextBox 5">
-            <a:extLst>
-              <a:ext uri="{FF2B5EF4-FFF2-40B4-BE49-F238E27FC236}">
-                <a16:creationId xmlns:a16="http://schemas.microsoft.com/office/drawing/2014/main" id="{E8AC05D6-54D6-2952-91A3-3178575C30B8}"/>
-              </a:ext>
-            </a:extLst>
-          </p:cNvPr>
-          <p:cNvSpPr txBox="1">
-            <a:spLocks noChangeArrowheads="1"/>
-          </p:cNvSpPr>
+          <p:cNvPr id="2" name="TextBox 1"/>
+          <p:cNvSpPr txBox="1"/>
           <p:nvPr/>
         </p:nvSpPr>
-        <p:spPr bwMode="auto">
+        <p:spPr>
           <a:xfrm>
-            <a:off x="10565314" y="6411160"/>
-            <a:ext cx="1520825" cy="292100"/>
+            <a:off x="630936" y="411480"/>
+            <a:ext cx="10241280" cy="411480"/>
           </a:xfrm>
           <a:prstGeom prst="rect">
             <a:avLst/>
           </a:prstGeom>
           <a:noFill/>
-          <a:ln>
-            <a:noFill/>
-          </a:ln>
         </p:spPr>
         <p:txBody>
-          <a:bodyPr wrap="none" lIns="91431" tIns="45715" rIns="91431" bIns="45715">
+          <a:bodyPr wrap="square" lIns="27432" tIns="9144" rIns="27432" bIns="9144">
             <a:spAutoFit/>
           </a:bodyPr>
           <a:lstStyle/>
           <a:p>
-            <a:pPr marL="0" marR="0" lvl="0" indent="0" algn="ctr" defTabSz="914400" rtl="0" eaLnBrk="1" fontAlgn="auto" latinLnBrk="1" hangingPunct="1">
+            <a:pPr>
               <a:lnSpc>
-                <a:spcPct val="100000"/>
+                <a:spcPct val="105000"/>
               </a:lnSpc>
-              <a:spcBef>
-                <a:spcPts val="0"/>
-              </a:spcBef>
               <a:spcAft>
-                <a:spcPts val="0"/>
+                <a:spcPts val="600"/>
               </a:spcAft>
-              <a:buClrTx/>
-              <a:buSzTx/>
+            </a:pPr>
+            <a:r>
+              <a:rPr sz="2200">
+                <a:solidFill>
+                  <a:srgbClr val="232323"/>
+                </a:solidFill>
+                <a:latin typeface="맑은 고딕"/>
+              </a:rPr>
+              <a:t>5-1. 아키텍처 구현을 통한 역량 향상</a:t>
+            </a:r>
+            <a:endParaRPr sz="1800" b="1" dirty="0">
+              <a:solidFill>
+                <a:srgbClr val="000000"/>
+              </a:solidFill>
+              <a:latin typeface="Malgun Gothic"/>
+            </a:endParaRPr>
+          </a:p>
+        </p:txBody>
+      </p:sp>
+      <p:sp>
+        <p:nvSpPr>
+          <p:cNvPr id="3" name="TextBox 2"/>
+          <p:cNvSpPr txBox="1"/>
+          <p:nvPr/>
+        </p:nvSpPr>
+        <p:spPr>
+          <a:xfrm>
+            <a:off x="749808" y="868680"/>
+            <a:ext cx="10104120" cy="4592026"/>
+          </a:xfrm>
+          <a:prstGeom prst="rect">
+            <a:avLst/>
+          </a:prstGeom>
+          <a:noFill/>
+        </p:spPr>
+        <p:txBody>
+          <a:bodyPr wrap="square" lIns="0" tIns="0" rIns="0" bIns="0">
+            <a:spAutoFit/>
+          </a:bodyPr>
+          <a:lstStyle/>
+          <a:p>
+            <a:pPr>
+              <a:spcAft>
+                <a:spcPts val="600"/>
+              </a:spcAft>
+            </a:pPr>
+            <a:r>
+              <a:rPr sz="1600">
+                <a:solidFill>
+                  <a:srgbClr val="232323"/>
+                </a:solidFill>
+                <a:latin typeface="맑은 고딕"/>
+              </a:rPr>
+              <a:t>수행 내용</a:t>
+            </a:r>
+            <a:endParaRPr sz="1400" b="0" dirty="0">
+              <a:solidFill>
+                <a:srgbClr val="000000"/>
+              </a:solidFill>
+            </a:endParaRPr>
+          </a:p>
+          <a:p>
+            <a:pPr>
+              <a:spcAft>
+                <a:spcPts val="600"/>
+              </a:spcAft>
+            </a:pPr>
+            <a:r>
+              <a:rPr sz="1600">
+                <a:solidFill>
+                  <a:srgbClr val="232323"/>
+                </a:solidFill>
+                <a:latin typeface="맑은 고딕"/>
+              </a:rPr>
+              <a:t>• GameMode, GameState, PlayerState, Controller 책임 분리</a:t>
+            </a:r>
+          </a:p>
+          <a:p>
+            <a:pPr>
+              <a:spcAft>
+                <a:spcPts val="600"/>
+              </a:spcAft>
+            </a:pPr>
+            <a:r>
+              <a:rPr sz="1600">
+                <a:solidFill>
+                  <a:srgbClr val="232323"/>
+                </a:solidFill>
+                <a:latin typeface="맑은 고딕"/>
+              </a:rPr>
+              <a:t>• 캐릭터 사망 이후에도 팀을 유지하도록 PlayerState 사용</a:t>
+            </a:r>
+          </a:p>
+          <a:p>
+            <a:pPr>
+              <a:spcAft>
+                <a:spcPts val="600"/>
+              </a:spcAft>
+            </a:pPr>
+            <a:r>
+              <a:rPr sz="1600">
+                <a:solidFill>
+                  <a:srgbClr val="232323"/>
+                </a:solidFill>
+                <a:latin typeface="맑은 고딕"/>
+              </a:rPr>
+              <a:t>• 로컬 UI와 서버 판정, 상태 복제 시점 구분</a:t>
+            </a:r>
+          </a:p>
+          <a:p>
+            <a:pPr>
+              <a:spcAft>
+                <a:spcPts val="600"/>
+              </a:spcAft>
+            </a:pPr>
+            <a:r>
+              <a:rPr sz="1600">
+                <a:solidFill>
+                  <a:srgbClr val="232323"/>
+                </a:solidFill>
+                <a:latin typeface="맑은 고딕"/>
+              </a:rPr>
+              <a:t>• 공통 전투 로직을 Multi 기반으로 정리하고 FPS 정책 분리</a:t>
+            </a:r>
+          </a:p>
+          <a:p>
+            <a:pPr>
+              <a:spcAft>
+                <a:spcPts val="600"/>
+              </a:spcAft>
+            </a:pPr>
+            <a:endParaRPr sz="1600">
+              <a:solidFill>
+                <a:srgbClr val="232323"/>
+              </a:solidFill>
+              <a:latin typeface="맑은 고딕"/>
+            </a:endParaRPr>
+          </a:p>
+          <a:p>
+            <a:pPr>
+              <a:spcAft>
+                <a:spcPts val="600"/>
+              </a:spcAft>
+            </a:pPr>
+            <a:r>
+              <a:rPr sz="1600">
+                <a:solidFill>
+                  <a:srgbClr val="232323"/>
+                </a:solidFill>
+                <a:latin typeface="맑은 고딕"/>
+              </a:rPr>
+              <a:t>향상된 실무 역량</a:t>
+            </a:r>
+          </a:p>
+          <a:p>
+            <a:pPr>
+              <a:spcAft>
+                <a:spcPts val="600"/>
+              </a:spcAft>
+            </a:pPr>
+            <a:r>
+              <a:rPr sz="1600">
+                <a:solidFill>
+                  <a:srgbClr val="232323"/>
+                </a:solidFill>
+                <a:latin typeface="맑은 고딕"/>
+              </a:rPr>
+              <a:t>• 권한·공유 범위·객체 수명에 따라 상태 소유 위치 판단</a:t>
+            </a:r>
+          </a:p>
+          <a:p>
+            <a:pPr>
+              <a:spcAft>
+                <a:spcPts val="600"/>
+              </a:spcAft>
+            </a:pPr>
+            <a:r>
+              <a:rPr sz="1600">
+                <a:solidFill>
+                  <a:srgbClr val="232323"/>
+                </a:solidFill>
+                <a:latin typeface="맑은 고딕"/>
+              </a:rPr>
+              <a:t>• 서버 요청과 클라이언트 표현의 경계 이해</a:t>
+            </a:r>
+          </a:p>
+          <a:p>
+            <a:pPr>
+              <a:spcAft>
+                <a:spcPts val="600"/>
+              </a:spcAft>
+            </a:pPr>
+            <a:r>
+              <a:rPr sz="1600">
+                <a:solidFill>
+                  <a:srgbClr val="232323"/>
+                </a:solidFill>
+                <a:latin typeface="맑은 고딕"/>
+              </a:rPr>
+              <a:t>• 기존 코드 재사용과 신규 기능 확장의 책임 구분</a:t>
+            </a:r>
+          </a:p>
+        </p:txBody>
+      </p:sp>
+    </p:spTree>
+  </p:cSld>
+  <p:clrMapOvr>
+    <a:masterClrMapping/>
+  </p:clrMapOvr>
+</p:sld>
+</file>
+
+<file path=ppt/slides/slide6.xml><?xml version="1.0" encoding="utf-8"?>
+<p:sld xmlns:a="http://schemas.openxmlformats.org/drawingml/2006/main" xmlns:r="http://schemas.openxmlformats.org/officeDocument/2006/relationships" xmlns:p="http://schemas.openxmlformats.org/presentationml/2006/main">
+  <p:cSld>
+    <p:spTree>
+      <p:nvGrpSpPr>
+        <p:cNvPr id="1" name=""/>
+        <p:cNvGrpSpPr/>
+        <p:nvPr/>
+      </p:nvGrpSpPr>
+      <p:grpSpPr>
+        <a:xfrm>
+          <a:off x="0" y="0"/>
+          <a:ext cx="0" cy="0"/>
+          <a:chOff x="0" y="0"/>
+          <a:chExt cx="0" cy="0"/>
+        </a:xfrm>
+      </p:grpSpPr>
+      <p:sp>
+        <p:nvSpPr>
+          <p:cNvPr id="3" name="TextBox 2">
+            <a:extLst>
+              <a:ext uri="{FF2B5EF4-FFF2-40B4-BE49-F238E27FC236}">
+                <a16:creationId xmlns:a16="http://schemas.microsoft.com/office/drawing/2014/main" id="{36A1E3BF-FDE8-1DF2-B879-20888B61F130}"/>
+              </a:ext>
+            </a:extLst>
+          </p:cNvPr>
+          <p:cNvSpPr txBox="1"/>
+          <p:nvPr/>
+        </p:nvSpPr>
+        <p:spPr>
+          <a:xfrm>
+            <a:off x="433800" y="474345"/>
+            <a:ext cx="10233097" cy="5909310"/>
+          </a:xfrm>
+          <a:prstGeom prst="rect">
+            <a:avLst/>
+          </a:prstGeom>
+          <a:noFill/>
+        </p:spPr>
+        <p:txBody>
+          <a:bodyPr wrap="square">
+            <a:spAutoFit/>
+          </a:bodyPr>
+          <a:lstStyle/>
+          <a:p>
+            <a:pPr marL="742950" lvl="1" indent="-285750">
+              <a:spcAft>
+                <a:spcPts val="600"/>
+              </a:spcAft>
               <a:buFontTx/>
-              <a:buNone/>
-              <a:tabLst/>
-              <a:defRPr/>
-            </a:pPr>
-            <a:r>
-              <a:rPr kumimoji="0" lang="en-US" altLang="ko-KR" sz="1300" b="0" i="0" u="sng" strike="noStrike" kern="1200" cap="none" spc="0" normalizeH="0" baseline="0" noProof="0" dirty="0">
-                <a:ln>
-                  <a:solidFill>
-                    <a:srgbClr val="4F81BD">
-                      <a:alpha val="0"/>
-                    </a:srgbClr>
-                  </a:solidFill>
-                </a:ln>
-                <a:solidFill>
-                  <a:prstClr val="white">
-                    <a:lumMod val="50000"/>
-                  </a:prstClr>
-                </a:solidFill>
-                <a:effectLst/>
-                <a:uLnTx/>
-                <a:uFillTx/>
-                <a:latin typeface="맑은 고딕"/>
-                <a:ea typeface="맑은 고딕" panose="020B0503020000020004" pitchFamily="50" charset="-127"/>
-                <a:cs typeface="+mn-cs"/>
-              </a:rPr>
-              <a:t>End of Document</a:t>
-            </a:r>
-            <a:endParaRPr kumimoji="0" lang="ko-KR" altLang="en-US" sz="1300" b="0" i="0" u="sng" strike="noStrike" kern="1200" cap="none" spc="0" normalizeH="0" baseline="0" noProof="0" dirty="0">
-              <a:ln>
-                <a:solidFill>
-                  <a:srgbClr val="4F81BD">
-                    <a:alpha val="0"/>
-                  </a:srgbClr>
-                </a:solidFill>
-              </a:ln>
+              <a:buChar char="-"/>
+            </a:pPr>
+            <a:r>
+              <a:rPr sz="1600">
+                <a:solidFill>
+                  <a:srgbClr val="232323"/>
+                </a:solidFill>
+                <a:latin typeface="맑은 고딕"/>
+              </a:rPr>
+              <a:t>주요 클래스 및 함수</a:t>
+            </a:r>
+            <a:endParaRPr lang="en-US" altLang="ko-KR" sz="1400" dirty="0"/>
+          </a:p>
+          <a:p>
+            <a:pPr>
+              <a:spcAft>
+                <a:spcPts val="600"/>
+              </a:spcAft>
+            </a:pPr>
+            <a:r>
+              <a:rPr sz="1600">
+                <a:solidFill>
+                  <a:srgbClr val="232323"/>
+                </a:solidFill>
+                <a:latin typeface="맑은 고딕"/>
+              </a:rPr>
+              <a:t>• AProject_Z_MultiGameMode: TrySelectPlayerTeam(), RestartPlayer(), RegisterPlayerKill()</a:t>
+            </a:r>
+          </a:p>
+          <a:p>
+            <a:pPr>
+              <a:spcAft>
+                <a:spcPts val="600"/>
+              </a:spcAft>
+            </a:pPr>
+            <a:r>
+              <a:rPr sz="1600">
+                <a:solidFill>
+                  <a:srgbClr val="232323"/>
+                </a:solidFill>
+                <a:latin typeface="맑은 고딕"/>
+              </a:rPr>
+              <a:t>• AProject_Z_MultiGameState: TeamAScore, TeamBScore, MatchPhase</a:t>
+            </a:r>
+          </a:p>
+          <a:p>
+            <a:pPr>
+              <a:spcAft>
+                <a:spcPts val="600"/>
+              </a:spcAft>
+            </a:pPr>
+            <a:r>
+              <a:rPr sz="1600">
+                <a:solidFill>
+                  <a:srgbClr val="232323"/>
+                </a:solidFill>
+                <a:latin typeface="맑은 고딕"/>
+              </a:rPr>
+              <a:t>• AProject_Z_MultiPlayerState: PlayerTeam, OnRep_PlayerTeam()</a:t>
+            </a:r>
+          </a:p>
+          <a:p>
+            <a:pPr>
+              <a:spcAft>
+                <a:spcPts val="600"/>
+              </a:spcAft>
+            </a:pPr>
+            <a:r>
+              <a:rPr sz="1600">
+                <a:solidFill>
+                  <a:srgbClr val="232323"/>
+                </a:solidFill>
+                <a:latin typeface="맑은 고딕"/>
+              </a:rPr>
+              <a:t>• AProject_Z_MultiPlayerController: RequestTeamSelection(), CreateHUDWidget()</a:t>
+            </a:r>
+          </a:p>
+          <a:p>
+            <a:pPr>
+              <a:spcAft>
+                <a:spcPts val="600"/>
+              </a:spcAft>
+            </a:pPr>
+            <a:r>
+              <a:rPr sz="1600">
+                <a:solidFill>
+                  <a:srgbClr val="232323"/>
+                </a:solidFill>
+                <a:latin typeface="맑은 고딕"/>
+              </a:rPr>
+              <a:t>• AZCharacterBaseMulti: 공통 전투·재장전·피해·사망</a:t>
+            </a:r>
+          </a:p>
+          <a:p>
+            <a:pPr>
+              <a:spcAft>
+                <a:spcPts val="600"/>
+              </a:spcAft>
+            </a:pPr>
+            <a:r>
+              <a:rPr sz="1600">
+                <a:solidFill>
+                  <a:srgbClr val="232323"/>
+                </a:solidFill>
+                <a:latin typeface="맑은 고딕"/>
+              </a:rPr>
+              <a:t>• AZCharacter_FPS: FPS 입력·ADS·픽업 정책·마커</a:t>
+            </a:r>
+          </a:p>
+          <a:p>
+            <a:pPr>
+              <a:spcAft>
+                <a:spcPts val="600"/>
+              </a:spcAft>
+            </a:pPr>
+            <a:endParaRPr sz="1600">
               <a:solidFill>
-                <a:prstClr val="white">
-                  <a:lumMod val="50000"/>
-                </a:prstClr>
+                <a:srgbClr val="232323"/>
               </a:solidFill>
-              <a:effectLst/>
-              <a:uLnTx/>
-              <a:uFillTx/>
               <a:latin typeface="맑은 고딕"/>
-              <a:ea typeface="맑은 고딕" panose="020B0503020000020004" pitchFamily="50" charset="-127"/>
-              <a:cs typeface="+mn-cs"/>
             </a:endParaRPr>
+          </a:p>
+          <a:p>
+            <a:pPr>
+              <a:spcAft>
+                <a:spcPts val="600"/>
+              </a:spcAft>
+            </a:pPr>
+            <a:r>
+              <a:rPr sz="1600">
+                <a:solidFill>
+                  <a:srgbClr val="232323"/>
+                </a:solidFill>
+                <a:latin typeface="맑은 고딕"/>
+              </a:rPr>
+              <a:t>팀 입장 흐름</a:t>
+            </a:r>
+          </a:p>
+          <a:p>
+            <a:pPr>
+              <a:spcAft>
+                <a:spcPts val="600"/>
+              </a:spcAft>
+            </a:pPr>
+            <a:r>
+              <a:rPr sz="1600">
+                <a:solidFill>
+                  <a:srgbClr val="232323"/>
+                </a:solidFill>
+                <a:latin typeface="맑은 고딕"/>
+              </a:rPr>
+              <a:t>팀 UI → Controller 서버 RPC → GameMode 검증 → PlayerState 팀 저장 → 주변 스폰 탐색 → Pawn 준비 후 HUD 전환</a:t>
+            </a:r>
+          </a:p>
+          <a:p>
+            <a:pPr>
+              <a:spcAft>
+                <a:spcPts val="600"/>
+              </a:spcAft>
+            </a:pPr>
+            <a:r>
+              <a:rPr sz="1600">
+                <a:solidFill>
+                  <a:srgbClr val="232323"/>
+                </a:solidFill>
+                <a:latin typeface="맑은 고딕"/>
+              </a:rPr>
+              <a:t>※ 공간 부족 시 대기열 등록 후 기본 0.5초 간격 재탐색</a:t>
+            </a:r>
           </a:p>
         </p:txBody>
       </p:sp>
     </p:spTree>
     <p:extLst>
       <p:ext uri="{BB962C8B-B14F-4D97-AF65-F5344CB8AC3E}">
-        <p14:creationId xmlns:p14="http://schemas.microsoft.com/office/powerpoint/2010/main" val="3047833007"/>
+        <p14:creationId xmlns:p14="http://schemas.microsoft.com/office/powerpoint/2010/main" val="4210343612"/>
       </p:ext>
     </p:extLst>
+  </p:cSld>
+  <p:clrMapOvr>
+    <a:masterClrMapping/>
+  </p:clrMapOvr>
+</p:sld>
+</file>
+
+<file path=ppt/slides/slide7.xml><?xml version="1.0" encoding="utf-8"?>
+<p:sld xmlns:a="http://schemas.openxmlformats.org/drawingml/2006/main" xmlns:r="http://schemas.openxmlformats.org/officeDocument/2006/relationships" xmlns:p="http://schemas.openxmlformats.org/presentationml/2006/main">
+  <p:cSld>
+    <p:spTree>
+      <p:nvGrpSpPr>
+        <p:cNvPr id="1" name=""/>
+        <p:cNvGrpSpPr/>
+        <p:nvPr/>
+      </p:nvGrpSpPr>
+      <p:grpSpPr>
+        <a:xfrm>
+          <a:off x="0" y="0"/>
+          <a:ext cx="0" cy="0"/>
+          <a:chOff x="0" y="0"/>
+          <a:chExt cx="0" cy="0"/>
+        </a:xfrm>
+      </p:grpSpPr>
+      <p:sp>
+        <p:nvSpPr>
+          <p:cNvPr id="2" name="TextBox 1"/>
+          <p:cNvSpPr txBox="1"/>
+          <p:nvPr/>
+        </p:nvSpPr>
+        <p:spPr>
+          <a:xfrm>
+            <a:off x="630936" y="411480"/>
+            <a:ext cx="10241280" cy="411480"/>
+          </a:xfrm>
+          <a:prstGeom prst="rect">
+            <a:avLst/>
+          </a:prstGeom>
+          <a:noFill/>
+        </p:spPr>
+        <p:txBody>
+          <a:bodyPr wrap="square" lIns="27432" tIns="9144" rIns="27432" bIns="9144">
+            <a:spAutoFit/>
+          </a:bodyPr>
+          <a:lstStyle/>
+          <a:p>
+            <a:pPr>
+              <a:lnSpc>
+                <a:spcPct val="105000"/>
+              </a:lnSpc>
+              <a:spcAft>
+                <a:spcPts val="600"/>
+              </a:spcAft>
+            </a:pPr>
+            <a:r>
+              <a:rPr sz="2200">
+                <a:solidFill>
+                  <a:srgbClr val="232323"/>
+                </a:solidFill>
+                <a:latin typeface="맑은 고딕"/>
+              </a:rPr>
+              <a:t>5-2. 전투·투사체 구현을 통한 역량 향상</a:t>
+            </a:r>
+            <a:endParaRPr sz="1800" b="1" dirty="0">
+              <a:solidFill>
+                <a:srgbClr val="000000"/>
+              </a:solidFill>
+              <a:latin typeface="Malgun Gothic"/>
+            </a:endParaRPr>
+          </a:p>
+        </p:txBody>
+      </p:sp>
+      <p:sp>
+        <p:nvSpPr>
+          <p:cNvPr id="3" name="TextBox 2"/>
+          <p:cNvSpPr txBox="1"/>
+          <p:nvPr/>
+        </p:nvSpPr>
+        <p:spPr>
+          <a:xfrm>
+            <a:off x="749808" y="868680"/>
+            <a:ext cx="10104120" cy="5066002"/>
+          </a:xfrm>
+          <a:prstGeom prst="rect">
+            <a:avLst/>
+          </a:prstGeom>
+          <a:noFill/>
+        </p:spPr>
+        <p:txBody>
+          <a:bodyPr wrap="square" lIns="0" tIns="0" rIns="0" bIns="0">
+            <a:spAutoFit/>
+          </a:bodyPr>
+          <a:lstStyle/>
+          <a:p>
+            <a:pPr marL="285750" indent="-285750">
+              <a:spcAft>
+                <a:spcPts val="600"/>
+              </a:spcAft>
+              <a:buFont typeface="Arial" panose="020B0604020202020204" pitchFamily="34" charset="0"/>
+              <a:buChar char="•"/>
+            </a:pPr>
+            <a:r>
+              <a:rPr sz="1600">
+                <a:solidFill>
+                  <a:srgbClr val="232323"/>
+                </a:solidFill>
+                <a:latin typeface="맑은 고딕"/>
+              </a:rPr>
+              <a:t>수행 내용</a:t>
+            </a:r>
+          </a:p>
+          <a:p>
+            <a:pPr>
+              <a:spcAft>
+                <a:spcPts val="600"/>
+              </a:spcAft>
+            </a:pPr>
+            <a:r>
+              <a:rPr sz="1600">
+                <a:solidFill>
+                  <a:srgbClr val="232323"/>
+                </a:solidFill>
+                <a:latin typeface="맑은 고딕"/>
+              </a:rPr>
+              <a:t>• FPS 이동·달리기·ADS와 서버 속도 반영</a:t>
+            </a:r>
+          </a:p>
+          <a:p>
+            <a:pPr>
+              <a:spcAft>
+                <a:spcPts val="600"/>
+              </a:spcAft>
+            </a:pPr>
+            <a:r>
+              <a:rPr sz="1600">
+                <a:solidFill>
+                  <a:srgbClr val="232323"/>
+                </a:solidFill>
+                <a:latin typeface="맑은 고딕"/>
+              </a:rPr>
+              <a:t>• 서버 발사 검증: 생존·경기·재장전·탄약·쿨다운</a:t>
+            </a:r>
+          </a:p>
+          <a:p>
+            <a:pPr>
+              <a:spcAft>
+                <a:spcPts val="600"/>
+              </a:spcAft>
+            </a:pPr>
+            <a:r>
+              <a:rPr sz="1600">
+                <a:solidFill>
+                  <a:srgbClr val="232323"/>
+                </a:solidFill>
+                <a:latin typeface="맑은 고딕"/>
+              </a:rPr>
+              <a:t>• 총구 위치·카메라 조준점으로 발사 방향 계산</a:t>
+            </a:r>
+          </a:p>
+          <a:p>
+            <a:pPr>
+              <a:spcAft>
+                <a:spcPts val="600"/>
+              </a:spcAft>
+            </a:pPr>
+            <a:r>
+              <a:rPr sz="1600">
+                <a:solidFill>
+                  <a:srgbClr val="232323"/>
+                </a:solidFill>
+                <a:latin typeface="맑은 고딕"/>
+              </a:rPr>
+              <a:t>• 샷건 다중 발사·확산, 발사체 풀 획득·초기화·반환</a:t>
+            </a:r>
+          </a:p>
+          <a:p>
+            <a:pPr>
+              <a:spcAft>
+                <a:spcPts val="600"/>
+              </a:spcAft>
+            </a:pPr>
+            <a:r>
+              <a:rPr sz="1600">
+                <a:solidFill>
+                  <a:srgbClr val="232323"/>
+                </a:solidFill>
+                <a:latin typeface="맑은 고딕"/>
+              </a:rPr>
+              <a:t>• 쉴드 우선 피해, HP 감소, 사망·점수·리스폰 연결</a:t>
+            </a:r>
+          </a:p>
+          <a:p>
+            <a:pPr>
+              <a:spcAft>
+                <a:spcPts val="600"/>
+              </a:spcAft>
+            </a:pPr>
+            <a:endParaRPr sz="1600">
+              <a:solidFill>
+                <a:srgbClr val="232323"/>
+              </a:solidFill>
+              <a:latin typeface="맑은 고딕"/>
+            </a:endParaRPr>
+          </a:p>
+          <a:p>
+            <a:pPr>
+              <a:spcAft>
+                <a:spcPts val="600"/>
+              </a:spcAft>
+            </a:pPr>
+            <a:r>
+              <a:rPr sz="1600">
+                <a:solidFill>
+                  <a:srgbClr val="232323"/>
+                </a:solidFill>
+                <a:latin typeface="맑은 고딕"/>
+              </a:rPr>
+              <a:t>향상된 실무 역량</a:t>
+            </a:r>
+          </a:p>
+          <a:p>
+            <a:pPr>
+              <a:spcAft>
+                <a:spcPts val="600"/>
+              </a:spcAft>
+            </a:pPr>
+            <a:r>
+              <a:rPr sz="1600">
+                <a:solidFill>
+                  <a:srgbClr val="232323"/>
+                </a:solidFill>
+                <a:latin typeface="맑은 고딕"/>
+              </a:rPr>
+              <a:t>• 입력 → RPC → 서버 판정 → 충돌 → 상태 복제 추적</a:t>
+            </a:r>
+          </a:p>
+          <a:p>
+            <a:pPr>
+              <a:spcAft>
+                <a:spcPts val="600"/>
+              </a:spcAft>
+            </a:pPr>
+            <a:r>
+              <a:rPr sz="1600">
+                <a:solidFill>
+                  <a:srgbClr val="232323"/>
+                </a:solidFill>
+                <a:latin typeface="맑은 고딕"/>
+              </a:rPr>
+              <a:t>• 객체 재사용 시 충돌 무시·타이머·피격 기록 초기화</a:t>
+            </a:r>
+          </a:p>
+          <a:p>
+            <a:pPr>
+              <a:spcAft>
+                <a:spcPts val="600"/>
+              </a:spcAft>
+            </a:pPr>
+            <a:r>
+              <a:rPr sz="1600">
+                <a:solidFill>
+                  <a:srgbClr val="232323"/>
+                </a:solidFill>
+                <a:latin typeface="맑은 고딕"/>
+              </a:rPr>
+              <a:t>• 호스트·게스트 동작 차이를 단계별로 조사</a:t>
+            </a:r>
+          </a:p>
+        </p:txBody>
+      </p:sp>
+    </p:spTree>
+  </p:cSld>
+  <p:clrMapOvr>
+    <a:masterClrMapping/>
+  </p:clrMapOvr>
+</p:sld>
+</file>
+
+<file path=ppt/slides/slide8.xml><?xml version="1.0" encoding="utf-8"?>
+<p:sld xmlns:a="http://schemas.openxmlformats.org/drawingml/2006/main" xmlns:r="http://schemas.openxmlformats.org/officeDocument/2006/relationships" xmlns:p="http://schemas.openxmlformats.org/presentationml/2006/main">
+  <p:cSld>
+    <p:spTree>
+      <p:nvGrpSpPr>
+        <p:cNvPr id="1" name=""/>
+        <p:cNvGrpSpPr/>
+        <p:nvPr/>
+      </p:nvGrpSpPr>
+      <p:grpSpPr>
+        <a:xfrm>
+          <a:off x="0" y="0"/>
+          <a:ext cx="0" cy="0"/>
+          <a:chOff x="0" y="0"/>
+          <a:chExt cx="0" cy="0"/>
+        </a:xfrm>
+      </p:grpSpPr>
+      <p:sp>
+        <p:nvSpPr>
+          <p:cNvPr id="5" name="TextBox 4">
+            <a:extLst>
+              <a:ext uri="{FF2B5EF4-FFF2-40B4-BE49-F238E27FC236}">
+                <a16:creationId xmlns:a16="http://schemas.microsoft.com/office/drawing/2014/main" id="{481C478A-0DAA-E8ED-576F-5E75C316E295}"/>
+              </a:ext>
+            </a:extLst>
+          </p:cNvPr>
+          <p:cNvSpPr txBox="1"/>
+          <p:nvPr/>
+        </p:nvSpPr>
+        <p:spPr>
+          <a:xfrm>
+            <a:off x="433800" y="474345"/>
+            <a:ext cx="10233097" cy="5693866"/>
+          </a:xfrm>
+          <a:prstGeom prst="rect">
+            <a:avLst/>
+          </a:prstGeom>
+          <a:noFill/>
+        </p:spPr>
+        <p:txBody>
+          <a:bodyPr wrap="square">
+            <a:spAutoFit/>
+          </a:bodyPr>
+          <a:lstStyle/>
+          <a:p>
+            <a:pPr marL="742950" lvl="1" indent="-285750">
+              <a:spcAft>
+                <a:spcPts val="600"/>
+              </a:spcAft>
+              <a:buFontTx/>
+              <a:buChar char="-"/>
+            </a:pPr>
+            <a:r>
+              <a:rPr sz="1500">
+                <a:solidFill>
+                  <a:srgbClr val="232323"/>
+                </a:solidFill>
+                <a:latin typeface="맑은 고딕"/>
+              </a:rPr>
+              <a:t>주요 함수 및 처리 정책</a:t>
+            </a:r>
+            <a:endParaRPr lang="en-US" altLang="ko-KR" sz="1400" dirty="0"/>
+          </a:p>
+          <a:p>
+            <a:pPr>
+              <a:spcAft>
+                <a:spcPts val="600"/>
+              </a:spcAft>
+            </a:pPr>
+            <a:r>
+              <a:rPr sz="1500">
+                <a:solidFill>
+                  <a:srgbClr val="232323"/>
+                </a:solidFill>
+                <a:latin typeface="맑은 고딕"/>
+              </a:rPr>
+              <a:t>• Fire(), ServerRequestFire_Implementation(), FirePrimaryProjectile()</a:t>
+            </a:r>
+          </a:p>
+          <a:p>
+            <a:pPr>
+              <a:spcAft>
+                <a:spcPts val="600"/>
+              </a:spcAft>
+            </a:pPr>
+            <a:r>
+              <a:rPr sz="1500">
+                <a:solidFill>
+                  <a:srgbClr val="232323"/>
+                </a:solidFill>
+                <a:latin typeface="맑은 고딕"/>
+              </a:rPr>
+              <a:t>• AcquireActor(), ReleaseActor(), OnAcquiredFromPool_Implementation()</a:t>
+            </a:r>
+          </a:p>
+          <a:p>
+            <a:pPr>
+              <a:spcAft>
+                <a:spcPts val="600"/>
+              </a:spcAft>
+            </a:pPr>
+            <a:r>
+              <a:rPr sz="1500">
+                <a:solidFill>
+                  <a:srgbClr val="232323"/>
+                </a:solidFill>
+                <a:latin typeface="맑은 고딕"/>
+              </a:rPr>
+              <a:t>• HandleProjectileOverlap(), RuntimeHitActors, RuntimeRemainingPierceCount</a:t>
+            </a:r>
+          </a:p>
+          <a:p>
+            <a:pPr>
+              <a:spcAft>
+                <a:spcPts val="600"/>
+              </a:spcAft>
+            </a:pPr>
+            <a:r>
+              <a:rPr sz="1500">
+                <a:solidFill>
+                  <a:srgbClr val="232323"/>
+                </a:solidFill>
+                <a:latin typeface="맑은 고딕"/>
+              </a:rPr>
+              <a:t>• HandleReloadInput(), ServerRequestReload_Implementation(), ComplateServerReload()</a:t>
+            </a:r>
+          </a:p>
+          <a:p>
+            <a:pPr>
+              <a:spcAft>
+                <a:spcPts val="600"/>
+              </a:spcAft>
+            </a:pPr>
+            <a:r>
+              <a:rPr sz="1500">
+                <a:solidFill>
+                  <a:srgbClr val="232323"/>
+                </a:solidFill>
+                <a:latin typeface="맑은 고딕"/>
+              </a:rPr>
+              <a:t>• ReceivePlayerDamage(), CurrentShield, OnPlayerDeath()</a:t>
+            </a:r>
+          </a:p>
+          <a:p>
+            <a:pPr>
+              <a:spcAft>
+                <a:spcPts val="600"/>
+              </a:spcAft>
+            </a:pPr>
+            <a:endParaRPr sz="1500">
+              <a:solidFill>
+                <a:srgbClr val="232323"/>
+              </a:solidFill>
+              <a:latin typeface="맑은 고딕"/>
+            </a:endParaRPr>
+          </a:p>
+          <a:p>
+            <a:pPr>
+              <a:spcAft>
+                <a:spcPts val="600"/>
+              </a:spcAft>
+            </a:pPr>
+            <a:r>
+              <a:rPr sz="1500">
+                <a:solidFill>
+                  <a:srgbClr val="232323"/>
+                </a:solidFill>
+                <a:latin typeface="맑은 고딕"/>
+              </a:rPr>
+              <a:t>무기 정책</a:t>
+            </a:r>
+          </a:p>
+          <a:p>
+            <a:pPr>
+              <a:spcAft>
+                <a:spcPts val="600"/>
+              </a:spcAft>
+            </a:pPr>
+            <a:r>
+              <a:rPr sz="1500">
+                <a:solidFill>
+                  <a:srgbClr val="232323"/>
+                </a:solidFill>
+                <a:latin typeface="맑은 고딕"/>
+              </a:rPr>
+              <a:t>• 동일 DataAsset 습득 시 최대 3회 10% 강화·탄약 유지</a:t>
+            </a:r>
+          </a:p>
+          <a:p>
+            <a:pPr>
+              <a:spcAft>
+                <a:spcPts val="600"/>
+              </a:spcAft>
+            </a:pPr>
+            <a:r>
+              <a:rPr sz="1500">
+                <a:solidFill>
+                  <a:srgbClr val="232323"/>
+                </a:solidFill>
+                <a:latin typeface="맑은 고딕"/>
+              </a:rPr>
+              <a:t>• 다른 무기로 교체 시 강화 초기화·기본 탄약 적용</a:t>
+            </a:r>
+          </a:p>
+          <a:p>
+            <a:pPr>
+              <a:spcAft>
+                <a:spcPts val="600"/>
+              </a:spcAft>
+            </a:pPr>
+            <a:r>
+              <a:rPr sz="1500">
+                <a:solidFill>
+                  <a:srgbClr val="232323"/>
+                </a:solidFill>
+                <a:latin typeface="맑은 고딕"/>
+              </a:rPr>
+              <a:t>• 재장전 결과는 서버 타이머로 확정</a:t>
+            </a:r>
+          </a:p>
+          <a:p>
+            <a:pPr>
+              <a:spcAft>
+                <a:spcPts val="600"/>
+              </a:spcAft>
+            </a:pPr>
+            <a:r>
+              <a:rPr sz="1500">
+                <a:solidFill>
+                  <a:srgbClr val="232323"/>
+                </a:solidFill>
+                <a:latin typeface="맑은 고딕"/>
+              </a:rPr>
+              <a:t>※ 샷건 일부 발사체 생성 실패 시 처리 정책은 후속 검토</a:t>
+            </a:r>
+          </a:p>
+        </p:txBody>
+      </p:sp>
+    </p:spTree>
+    <p:extLst>
+      <p:ext uri="{BB962C8B-B14F-4D97-AF65-F5344CB8AC3E}">
+        <p14:creationId xmlns:p14="http://schemas.microsoft.com/office/powerpoint/2010/main" val="2117700054"/>
+      </p:ext>
+    </p:extLst>
+  </p:cSld>
+  <p:clrMapOvr>
+    <a:masterClrMapping/>
+  </p:clrMapOvr>
+</p:sld>
+</file>
+
+<file path=ppt/slides/slide9.xml><?xml version="1.0" encoding="utf-8"?>
+<p:sld xmlns:a="http://schemas.openxmlformats.org/drawingml/2006/main" xmlns:r="http://schemas.openxmlformats.org/officeDocument/2006/relationships" xmlns:p="http://schemas.openxmlformats.org/presentationml/2006/main">
+  <p:cSld>
+    <p:spTree>
+      <p:nvGrpSpPr>
+        <p:cNvPr id="1" name=""/>
+        <p:cNvGrpSpPr/>
+        <p:nvPr/>
+      </p:nvGrpSpPr>
+      <p:grpSpPr>
+        <a:xfrm>
+          <a:off x="0" y="0"/>
+          <a:ext cx="0" cy="0"/>
+          <a:chOff x="0" y="0"/>
+          <a:chExt cx="0" cy="0"/>
+        </a:xfrm>
+      </p:grpSpPr>
+      <p:sp>
+        <p:nvSpPr>
+          <p:cNvPr id="2" name="TextBox 1"/>
+          <p:cNvSpPr txBox="1"/>
+          <p:nvPr/>
+        </p:nvSpPr>
+        <p:spPr>
+          <a:xfrm>
+            <a:off x="630936" y="411480"/>
+            <a:ext cx="10241280" cy="411480"/>
+          </a:xfrm>
+          <a:prstGeom prst="rect">
+            <a:avLst/>
+          </a:prstGeom>
+          <a:noFill/>
+        </p:spPr>
+        <p:txBody>
+          <a:bodyPr wrap="square" lIns="27432" tIns="9144" rIns="27432" bIns="9144">
+            <a:spAutoFit/>
+          </a:bodyPr>
+          <a:lstStyle/>
+          <a:p>
+            <a:pPr>
+              <a:lnSpc>
+                <a:spcPct val="105000"/>
+              </a:lnSpc>
+              <a:spcAft>
+                <a:spcPts val="600"/>
+              </a:spcAft>
+            </a:pPr>
+            <a:r>
+              <a:rPr sz="2200">
+                <a:solidFill>
+                  <a:srgbClr val="232323"/>
+                </a:solidFill>
+                <a:latin typeface="맑은 고딕"/>
+              </a:rPr>
+              <a:t>5-3. UI·상호작용 구현을 통한 역량 향상</a:t>
+            </a:r>
+          </a:p>
+        </p:txBody>
+      </p:sp>
+      <p:sp>
+        <p:nvSpPr>
+          <p:cNvPr id="3" name="TextBox 2"/>
+          <p:cNvSpPr txBox="1"/>
+          <p:nvPr/>
+        </p:nvSpPr>
+        <p:spPr>
+          <a:xfrm>
+            <a:off x="699516" y="822960"/>
+            <a:ext cx="10104120" cy="4327338"/>
+          </a:xfrm>
+          <a:prstGeom prst="rect">
+            <a:avLst/>
+          </a:prstGeom>
+          <a:noFill/>
+        </p:spPr>
+        <p:txBody>
+          <a:bodyPr wrap="square" lIns="0" tIns="0" rIns="0" bIns="0">
+            <a:spAutoFit/>
+          </a:bodyPr>
+          <a:lstStyle/>
+          <a:p>
+            <a:pPr>
+              <a:spcAft>
+                <a:spcPts val="600"/>
+              </a:spcAft>
+            </a:pPr>
+            <a:r>
+              <a:rPr sz="1600">
+                <a:solidFill>
+                  <a:srgbClr val="232323"/>
+                </a:solidFill>
+                <a:latin typeface="맑은 고딕"/>
+              </a:rPr>
+              <a:t>수행 내용</a:t>
+            </a:r>
+            <a:endParaRPr sz="1400" b="0" dirty="0">
+              <a:solidFill>
+                <a:srgbClr val="000000"/>
+              </a:solidFill>
+            </a:endParaRPr>
+          </a:p>
+          <a:p>
+            <a:pPr>
+              <a:spcAft>
+                <a:spcPts val="600"/>
+              </a:spcAft>
+            </a:pPr>
+            <a:r>
+              <a:rPr sz="1600">
+                <a:solidFill>
+                  <a:srgbClr val="232323"/>
+                </a:solidFill>
+                <a:latin typeface="맑은 고딕"/>
+              </a:rPr>
+              <a:t>• Controller에서 소유 플레이어의 HUD 생성·전환</a:t>
+            </a:r>
+          </a:p>
+          <a:p>
+            <a:pPr>
+              <a:spcAft>
+                <a:spcPts val="600"/>
+              </a:spcAft>
+            </a:pPr>
+            <a:r>
+              <a:rPr sz="1600">
+                <a:solidFill>
+                  <a:srgbClr val="232323"/>
+                </a:solidFill>
+                <a:latin typeface="맑은 고딕"/>
+              </a:rPr>
+              <a:t>• HP·쉴드·탄약, 팀 점수·경기 시간 표시</a:t>
+            </a:r>
+          </a:p>
+          <a:p>
+            <a:pPr>
+              <a:spcAft>
+                <a:spcPts val="600"/>
+              </a:spcAft>
+            </a:pPr>
+            <a:r>
+              <a:rPr sz="1600">
+                <a:solidFill>
+                  <a:srgbClr val="232323"/>
+                </a:solidFill>
+                <a:latin typeface="맑은 고딕"/>
+              </a:rPr>
+              <a:t>• 피격 대상 HP Bar 및 시야 차폐를 고려한 팀 마커</a:t>
+            </a:r>
+          </a:p>
+          <a:p>
+            <a:pPr>
+              <a:spcAft>
+                <a:spcPts val="600"/>
+              </a:spcAft>
+            </a:pPr>
+            <a:r>
+              <a:rPr sz="1600">
+                <a:solidFill>
+                  <a:srgbClr val="232323"/>
+                </a:solidFill>
+                <a:latin typeface="맑은 고딕"/>
+              </a:rPr>
+              <a:t>• 팀 선택·스폰 대기·경기 결과·ESC 메뉴 연동</a:t>
+            </a:r>
+          </a:p>
+          <a:p>
+            <a:pPr>
+              <a:spcAft>
+                <a:spcPts val="600"/>
+              </a:spcAft>
+            </a:pPr>
+            <a:r>
+              <a:rPr sz="1600">
+                <a:solidFill>
+                  <a:srgbClr val="232323"/>
+                </a:solidFill>
+                <a:latin typeface="맑은 고딕"/>
+              </a:rPr>
+              <a:t>• 픽업 소비 성공 조건과 지점별 재생성 타이머 구성</a:t>
+            </a:r>
+          </a:p>
+          <a:p>
+            <a:pPr>
+              <a:spcAft>
+                <a:spcPts val="600"/>
+              </a:spcAft>
+            </a:pPr>
+            <a:endParaRPr sz="1600">
+              <a:solidFill>
+                <a:srgbClr val="232323"/>
+              </a:solidFill>
+              <a:latin typeface="맑은 고딕"/>
+            </a:endParaRPr>
+          </a:p>
+          <a:p>
+            <a:pPr>
+              <a:spcAft>
+                <a:spcPts val="600"/>
+              </a:spcAft>
+            </a:pPr>
+            <a:r>
+              <a:rPr sz="1600">
+                <a:solidFill>
+                  <a:srgbClr val="232323"/>
+                </a:solidFill>
+                <a:latin typeface="맑은 고딕"/>
+              </a:rPr>
+              <a:t>향상된 실무 역량</a:t>
+            </a:r>
+          </a:p>
+          <a:p>
+            <a:pPr>
+              <a:spcAft>
+                <a:spcPts val="600"/>
+              </a:spcAft>
+            </a:pPr>
+            <a:r>
+              <a:rPr sz="1600">
+                <a:solidFill>
+                  <a:srgbClr val="232323"/>
+                </a:solidFill>
+                <a:latin typeface="맑은 고딕"/>
+              </a:rPr>
+              <a:t>• Widget 클래스·인스턴스·데이터 준비 단계 구분</a:t>
+            </a:r>
+          </a:p>
+          <a:p>
+            <a:pPr>
+              <a:spcAft>
+                <a:spcPts val="600"/>
+              </a:spcAft>
+            </a:pPr>
+            <a:r>
+              <a:rPr sz="1600">
+                <a:solidFill>
+                  <a:srgbClr val="232323"/>
+                </a:solidFill>
+                <a:latin typeface="맑은 고딕"/>
+              </a:rPr>
+              <a:t>• 상태 복제와 로컬 표시의 갱신 시점 추적</a:t>
+            </a:r>
+          </a:p>
+          <a:p>
+            <a:pPr>
+              <a:spcAft>
+                <a:spcPts val="600"/>
+              </a:spcAft>
+            </a:pPr>
+            <a:r>
+              <a:rPr sz="1600">
+                <a:solidFill>
+                  <a:srgbClr val="232323"/>
+                </a:solidFill>
+                <a:latin typeface="맑은 고딕"/>
+              </a:rPr>
+              <a:t>• 서버 확정 상태와 사용자 화면 제어의 책임 분리</a:t>
+            </a:r>
+          </a:p>
+        </p:txBody>
+      </p:sp>
+    </p:spTree>
   </p:cSld>
   <p:clrMapOvr>
     <a:masterClrMapping/>
